--- a/Expert_System_presentation.pptx
+++ b/Expert_System_presentation.pptx
@@ -6,20 +6,24 @@
   </p:sldMasterIdLst>
   <p:sldIdLst>
     <p:sldId id="258" r:id="rId2"/>
-    <p:sldId id="259" r:id="rId3"/>
-    <p:sldId id="260" r:id="rId4"/>
-    <p:sldId id="261" r:id="rId5"/>
-    <p:sldId id="262" r:id="rId6"/>
-    <p:sldId id="263" r:id="rId7"/>
-    <p:sldId id="264" r:id="rId8"/>
-    <p:sldId id="265" r:id="rId9"/>
-    <p:sldId id="266" r:id="rId10"/>
-    <p:sldId id="267" r:id="rId11"/>
-    <p:sldId id="268" r:id="rId12"/>
-    <p:sldId id="270" r:id="rId13"/>
-    <p:sldId id="269" r:id="rId14"/>
-    <p:sldId id="271" r:id="rId15"/>
-    <p:sldId id="273" r:id="rId16"/>
+    <p:sldId id="274" r:id="rId3"/>
+    <p:sldId id="259" r:id="rId4"/>
+    <p:sldId id="260" r:id="rId5"/>
+    <p:sldId id="261" r:id="rId6"/>
+    <p:sldId id="262" r:id="rId7"/>
+    <p:sldId id="263" r:id="rId8"/>
+    <p:sldId id="264" r:id="rId9"/>
+    <p:sldId id="265" r:id="rId10"/>
+    <p:sldId id="266" r:id="rId11"/>
+    <p:sldId id="277" r:id="rId12"/>
+    <p:sldId id="267" r:id="rId13"/>
+    <p:sldId id="268" r:id="rId14"/>
+    <p:sldId id="270" r:id="rId15"/>
+    <p:sldId id="269" r:id="rId16"/>
+    <p:sldId id="271" r:id="rId17"/>
+    <p:sldId id="275" r:id="rId18"/>
+    <p:sldId id="276" r:id="rId19"/>
+    <p:sldId id="273" r:id="rId20"/>
   </p:sldIdLst>
   <p:sldSz cx="12192000" cy="6858000"/>
   <p:notesSz cx="6858000" cy="9144000"/>
@@ -273,7 +277,7 @@
           <a:p>
             <a:fld id="{6921FB4E-363F-466D-9360-9089C43E6A9A}" type="datetimeFigureOut">
               <a:rPr lang="ru-RU" smtClean="0"/>
-              <a:t>08.06.2026</a:t>
+              <a:t>25.06.2026</a:t>
             </a:fld>
             <a:endParaRPr lang="ru-RU"/>
           </a:p>
@@ -471,7 +475,7 @@
           <a:p>
             <a:fld id="{6921FB4E-363F-466D-9360-9089C43E6A9A}" type="datetimeFigureOut">
               <a:rPr lang="ru-RU" smtClean="0"/>
-              <a:t>08.06.2026</a:t>
+              <a:t>25.06.2026</a:t>
             </a:fld>
             <a:endParaRPr lang="ru-RU"/>
           </a:p>
@@ -679,7 +683,7 @@
           <a:p>
             <a:fld id="{6921FB4E-363F-466D-9360-9089C43E6A9A}" type="datetimeFigureOut">
               <a:rPr lang="ru-RU" smtClean="0"/>
-              <a:t>08.06.2026</a:t>
+              <a:t>25.06.2026</a:t>
             </a:fld>
             <a:endParaRPr lang="ru-RU"/>
           </a:p>
@@ -877,7 +881,7 @@
           <a:p>
             <a:fld id="{6921FB4E-363F-466D-9360-9089C43E6A9A}" type="datetimeFigureOut">
               <a:rPr lang="ru-RU" smtClean="0"/>
-              <a:t>08.06.2026</a:t>
+              <a:t>25.06.2026</a:t>
             </a:fld>
             <a:endParaRPr lang="ru-RU"/>
           </a:p>
@@ -1152,7 +1156,7 @@
           <a:p>
             <a:fld id="{6921FB4E-363F-466D-9360-9089C43E6A9A}" type="datetimeFigureOut">
               <a:rPr lang="ru-RU" smtClean="0"/>
-              <a:t>08.06.2026</a:t>
+              <a:t>25.06.2026</a:t>
             </a:fld>
             <a:endParaRPr lang="ru-RU"/>
           </a:p>
@@ -1417,7 +1421,7 @@
           <a:p>
             <a:fld id="{6921FB4E-363F-466D-9360-9089C43E6A9A}" type="datetimeFigureOut">
               <a:rPr lang="ru-RU" smtClean="0"/>
-              <a:t>08.06.2026</a:t>
+              <a:t>25.06.2026</a:t>
             </a:fld>
             <a:endParaRPr lang="ru-RU"/>
           </a:p>
@@ -1829,7 +1833,7 @@
           <a:p>
             <a:fld id="{6921FB4E-363F-466D-9360-9089C43E6A9A}" type="datetimeFigureOut">
               <a:rPr lang="ru-RU" smtClean="0"/>
-              <a:t>08.06.2026</a:t>
+              <a:t>25.06.2026</a:t>
             </a:fld>
             <a:endParaRPr lang="ru-RU"/>
           </a:p>
@@ -1970,7 +1974,7 @@
           <a:p>
             <a:fld id="{6921FB4E-363F-466D-9360-9089C43E6A9A}" type="datetimeFigureOut">
               <a:rPr lang="ru-RU" smtClean="0"/>
-              <a:t>08.06.2026</a:t>
+              <a:t>25.06.2026</a:t>
             </a:fld>
             <a:endParaRPr lang="ru-RU"/>
           </a:p>
@@ -2083,7 +2087,7 @@
           <a:p>
             <a:fld id="{6921FB4E-363F-466D-9360-9089C43E6A9A}" type="datetimeFigureOut">
               <a:rPr lang="ru-RU" smtClean="0"/>
-              <a:t>08.06.2026</a:t>
+              <a:t>25.06.2026</a:t>
             </a:fld>
             <a:endParaRPr lang="ru-RU"/>
           </a:p>
@@ -2394,7 +2398,7 @@
           <a:p>
             <a:fld id="{6921FB4E-363F-466D-9360-9089C43E6A9A}" type="datetimeFigureOut">
               <a:rPr lang="ru-RU" smtClean="0"/>
-              <a:t>08.06.2026</a:t>
+              <a:t>25.06.2026</a:t>
             </a:fld>
             <a:endParaRPr lang="ru-RU"/>
           </a:p>
@@ -2682,7 +2686,7 @@
           <a:p>
             <a:fld id="{6921FB4E-363F-466D-9360-9089C43E6A9A}" type="datetimeFigureOut">
               <a:rPr lang="ru-RU" smtClean="0"/>
-              <a:t>08.06.2026</a:t>
+              <a:t>25.06.2026</a:t>
             </a:fld>
             <a:endParaRPr lang="ru-RU"/>
           </a:p>
@@ -2923,7 +2927,7 @@
           <a:p>
             <a:fld id="{6921FB4E-363F-466D-9360-9089C43E6A9A}" type="datetimeFigureOut">
               <a:rPr lang="ru-RU" smtClean="0"/>
-              <a:t>08.06.2026</a:t>
+              <a:t>25.06.2026</a:t>
             </a:fld>
             <a:endParaRPr lang="ru-RU"/>
           </a:p>
@@ -3356,7 +3360,7 @@
         </p:nvSpPr>
         <p:spPr>
           <a:xfrm>
-            <a:off x="1857712" y="569203"/>
+            <a:off x="1842456" y="525469"/>
             <a:ext cx="8507088" cy="1300672"/>
           </a:xfrm>
           <a:prstGeom prst="rect">
@@ -3388,80 +3392,80 @@
           </a:lstStyle>
           <a:p>
             <a:r>
-              <a:rPr lang="ru-RU" sz="1800">
+              <a:rPr lang="ru-RU" sz="1800" dirty="0">
                 <a:latin typeface="Times New Roman" panose="02020603050405020304" pitchFamily="18" charset="0"/>
                 <a:cs typeface="Times New Roman" panose="02020603050405020304" pitchFamily="18" charset="0"/>
               </a:rPr>
               <a:t>МИНИСТЕРСТВО</a:t>
             </a:r>
             <a:r>
-              <a:rPr lang="en-US" sz="1800">
+              <a:rPr lang="en-US" sz="1800" dirty="0">
                 <a:latin typeface="Times New Roman" panose="02020603050405020304" pitchFamily="18" charset="0"/>
                 <a:cs typeface="Times New Roman" panose="02020603050405020304" pitchFamily="18" charset="0"/>
               </a:rPr>
               <a:t> </a:t>
             </a:r>
             <a:r>
-              <a:rPr lang="ru-RU" sz="1800">
+              <a:rPr lang="ru-RU" sz="1800" dirty="0">
                 <a:latin typeface="Times New Roman" panose="02020603050405020304" pitchFamily="18" charset="0"/>
                 <a:cs typeface="Times New Roman" panose="02020603050405020304" pitchFamily="18" charset="0"/>
               </a:rPr>
               <a:t>НАУКИ И ВЫСШЕГО ОБРАЗОВАНИЯ РОССИЙСКОЙ ФЕДЕРАЦИИ</a:t>
             </a:r>
             <a:br>
-              <a:rPr lang="ru-RU" sz="1800">
+              <a:rPr lang="ru-RU" sz="1800" dirty="0">
                 <a:latin typeface="Times New Roman" panose="02020603050405020304" pitchFamily="18" charset="0"/>
                 <a:cs typeface="Times New Roman" panose="02020603050405020304" pitchFamily="18" charset="0"/>
               </a:rPr>
             </a:br>
             <a:r>
-              <a:rPr lang="ru-RU" sz="1800">
+              <a:rPr lang="ru-RU" sz="1800" dirty="0">
                 <a:latin typeface="Times New Roman" panose="02020603050405020304" pitchFamily="18" charset="0"/>
                 <a:cs typeface="Times New Roman" panose="02020603050405020304" pitchFamily="18" charset="0"/>
               </a:rPr>
               <a:t>Федеральное государственное бюджетное образовательное учреждение высшего образования</a:t>
             </a:r>
             <a:br>
-              <a:rPr lang="ru-RU" sz="1800">
+              <a:rPr lang="ru-RU" sz="1800" dirty="0">
                 <a:latin typeface="Times New Roman" panose="02020603050405020304" pitchFamily="18" charset="0"/>
                 <a:cs typeface="Times New Roman" panose="02020603050405020304" pitchFamily="18" charset="0"/>
               </a:rPr>
             </a:br>
             <a:r>
-              <a:rPr lang="ru-RU" sz="1800">
+              <a:rPr lang="ru-RU" sz="1800" dirty="0">
                 <a:latin typeface="Times New Roman" panose="02020603050405020304" pitchFamily="18" charset="0"/>
                 <a:cs typeface="Times New Roman" panose="02020603050405020304" pitchFamily="18" charset="0"/>
               </a:rPr>
               <a:t> </a:t>
             </a:r>
             <a:br>
-              <a:rPr lang="ru-RU" sz="1800">
+              <a:rPr lang="ru-RU" sz="1800" dirty="0">
                 <a:latin typeface="Times New Roman" panose="02020603050405020304" pitchFamily="18" charset="0"/>
                 <a:cs typeface="Times New Roman" panose="02020603050405020304" pitchFamily="18" charset="0"/>
               </a:rPr>
             </a:br>
             <a:r>
-              <a:rPr lang="ru-RU" sz="1800" b="1">
+              <a:rPr lang="ru-RU" sz="1800" b="1" dirty="0">
                 <a:latin typeface="Times New Roman" panose="02020603050405020304" pitchFamily="18" charset="0"/>
                 <a:cs typeface="Times New Roman" panose="02020603050405020304" pitchFamily="18" charset="0"/>
               </a:rPr>
               <a:t>«КУБАНСКИЙ ГОСУДАРСТВЕННЫЙ УНИВЕРСИТЕТ»</a:t>
             </a:r>
             <a:br>
-              <a:rPr lang="ru-RU" sz="1800">
+              <a:rPr lang="ru-RU" sz="1800" dirty="0">
                 <a:latin typeface="Times New Roman" panose="02020603050405020304" pitchFamily="18" charset="0"/>
                 <a:cs typeface="Times New Roman" panose="02020603050405020304" pitchFamily="18" charset="0"/>
               </a:rPr>
             </a:br>
             <a:r>
-              <a:rPr lang="ru-RU" sz="1800" b="1">
+              <a:rPr lang="ru-RU" sz="1800" b="1" dirty="0">
                 <a:latin typeface="Times New Roman" panose="02020603050405020304" pitchFamily="18" charset="0"/>
                 <a:cs typeface="Times New Roman" panose="02020603050405020304" pitchFamily="18" charset="0"/>
               </a:rPr>
               <a:t>(ФГБОУ ВО «КубГУ»)</a:t>
             </a:r>
             <a:br>
-              <a:rPr lang="ru-RU" sz="1800">
+              <a:rPr lang="ru-RU" sz="1800" dirty="0">
                 <a:latin typeface="Times New Roman" panose="02020603050405020304" pitchFamily="18" charset="0"/>
                 <a:cs typeface="Times New Roman" panose="02020603050405020304" pitchFamily="18" charset="0"/>
               </a:rPr>
@@ -3487,7 +3491,7 @@
         </p:nvSpPr>
         <p:spPr>
           <a:xfrm>
-            <a:off x="2463540" y="3063805"/>
+            <a:off x="2326002" y="3345657"/>
             <a:ext cx="7539996" cy="923330"/>
           </a:xfrm>
           <a:prstGeom prst="rect">
@@ -3530,7 +3534,7 @@
         </p:nvSpPr>
         <p:spPr>
           <a:xfrm>
-            <a:off x="1857712" y="2247275"/>
+            <a:off x="1842456" y="2359589"/>
             <a:ext cx="8485996" cy="369332"/>
           </a:xfrm>
           <a:prstGeom prst="rect">
@@ -3569,7 +3573,7 @@
         </p:nvSpPr>
         <p:spPr>
           <a:xfrm>
-            <a:off x="534925" y="5015316"/>
+            <a:off x="473634" y="5197385"/>
             <a:ext cx="4282451" cy="1200329"/>
           </a:xfrm>
           <a:prstGeom prst="rect">
@@ -3645,7 +3649,7 @@
         </p:nvSpPr>
         <p:spPr>
           <a:xfrm>
-            <a:off x="8464296" y="5153815"/>
+            <a:off x="8479867" y="5335884"/>
             <a:ext cx="3238499" cy="923330"/>
           </a:xfrm>
           <a:prstGeom prst="rect">
@@ -3751,7 +3755,7 @@
                 <a:latin typeface="Times New Roman" panose="02020603050405020304" pitchFamily="18" charset="0"/>
                 <a:cs typeface="Times New Roman" panose="02020603050405020304" pitchFamily="18" charset="0"/>
               </a:rPr>
-              <a:t>Создание теста и публикация</a:t>
+              <a:t>Банк вопросов</a:t>
             </a:r>
           </a:p>
         </p:txBody>
@@ -3793,10 +3797,10 @@
       </p:sp>
       <p:pic>
         <p:nvPicPr>
-          <p:cNvPr id="8" name="Рисунок 7">
-            <a:extLst>
-              <a:ext uri="{FF2B5EF4-FFF2-40B4-BE49-F238E27FC236}">
-                <a16:creationId xmlns:a16="http://schemas.microsoft.com/office/drawing/2014/main" id="{0CBC98B6-9C84-8E4A-1FF9-EC0521E39CD6}"/>
+          <p:cNvPr id="6" name="Рисунок 5">
+            <a:extLst>
+              <a:ext uri="{FF2B5EF4-FFF2-40B4-BE49-F238E27FC236}">
+                <a16:creationId xmlns:a16="http://schemas.microsoft.com/office/drawing/2014/main" id="{66986AC6-08F4-90A8-A7FE-E09E8A9403CF}"/>
               </a:ext>
             </a:extLst>
           </p:cNvPr>
@@ -3813,18 +3817,58 @@
         </p:blipFill>
         <p:spPr>
           <a:xfrm>
-            <a:off x="838200" y="1023698"/>
-            <a:ext cx="10264989" cy="5049556"/>
+            <a:off x="283335" y="735090"/>
+            <a:ext cx="4328112" cy="5696354"/>
           </a:xfrm>
           <a:prstGeom prst="rect">
             <a:avLst/>
           </a:prstGeom>
+          <a:ln w="12700">
+            <a:solidFill>
+              <a:schemeClr val="tx1"/>
+            </a:solidFill>
+          </a:ln>
+        </p:spPr>
+      </p:pic>
+      <p:pic>
+        <p:nvPicPr>
+          <p:cNvPr id="8" name="Рисунок 7">
+            <a:extLst>
+              <a:ext uri="{FF2B5EF4-FFF2-40B4-BE49-F238E27FC236}">
+                <a16:creationId xmlns:a16="http://schemas.microsoft.com/office/drawing/2014/main" id="{72E866CF-57AE-5284-364F-C22E2B15848C}"/>
+              </a:ext>
+            </a:extLst>
+          </p:cNvPr>
+          <p:cNvPicPr>
+            <a:picLocks noChangeAspect="1"/>
+          </p:cNvPicPr>
+          <p:nvPr/>
+        </p:nvPicPr>
+        <p:blipFill>
+          <a:blip r:embed="rId3"/>
+          <a:stretch>
+            <a:fillRect/>
+          </a:stretch>
+        </p:blipFill>
+        <p:spPr>
+          <a:xfrm>
+            <a:off x="4782146" y="1809148"/>
+            <a:ext cx="7126520" cy="3239704"/>
+          </a:xfrm>
+          <a:prstGeom prst="rect">
+            <a:avLst/>
+          </a:prstGeom>
+          <a:ln w="12700">
+            <a:solidFill>
+              <a:schemeClr val="tx1"/>
+            </a:solidFill>
+          </a:ln>
         </p:spPr>
       </p:pic>
     </p:spTree>
     <p:extLst>
       <p:ext uri="{BB962C8B-B14F-4D97-AF65-F5344CB8AC3E}">
-        <p14:creationId xmlns:p14="http://schemas.microsoft.com/office/powerpoint/2010/main" val="2427236525"/>
+        <p14:creationId xmlns:p14="http://schemas.microsoft.com/office/powerpoint/2010/main" val="816686127"/>
       </p:ext>
     </p:extLst>
   </p:cSld>
@@ -3885,7 +3929,7 @@
                 <a:latin typeface="Times New Roman" panose="02020603050405020304" pitchFamily="18" charset="0"/>
                 <a:cs typeface="Times New Roman" panose="02020603050405020304" pitchFamily="18" charset="0"/>
               </a:rPr>
-              <a:t>Создание теста и публикация</a:t>
+              <a:t>Генерация теста</a:t>
             </a:r>
           </a:p>
         </p:txBody>
@@ -3927,10 +3971,10 @@
       </p:sp>
       <p:pic>
         <p:nvPicPr>
-          <p:cNvPr id="7" name="Рисунок 6">
-            <a:extLst>
-              <a:ext uri="{FF2B5EF4-FFF2-40B4-BE49-F238E27FC236}">
-                <a16:creationId xmlns:a16="http://schemas.microsoft.com/office/drawing/2014/main" id="{D44048C1-D1F2-C830-ED9F-E3325A0E9105}"/>
+          <p:cNvPr id="5" name="Рисунок 4">
+            <a:extLst>
+              <a:ext uri="{FF2B5EF4-FFF2-40B4-BE49-F238E27FC236}">
+                <a16:creationId xmlns:a16="http://schemas.microsoft.com/office/drawing/2014/main" id="{352D88FB-EB73-F69D-861B-4BFCDB616A3B}"/>
               </a:ext>
             </a:extLst>
           </p:cNvPr>
@@ -3947,8 +3991,8 @@
         </p:blipFill>
         <p:spPr>
           <a:xfrm>
-            <a:off x="2369241" y="887768"/>
-            <a:ext cx="7453518" cy="5772309"/>
+            <a:off x="3105511" y="887768"/>
+            <a:ext cx="5980977" cy="5834175"/>
           </a:xfrm>
           <a:prstGeom prst="rect">
             <a:avLst/>
@@ -3958,7 +4002,7 @@
     </p:spTree>
     <p:extLst>
       <p:ext uri="{BB962C8B-B14F-4D97-AF65-F5344CB8AC3E}">
-        <p14:creationId xmlns:p14="http://schemas.microsoft.com/office/powerpoint/2010/main" val="1599161247"/>
+        <p14:creationId xmlns:p14="http://schemas.microsoft.com/office/powerpoint/2010/main" val="4129437501"/>
       </p:ext>
     </p:extLst>
   </p:cSld>
@@ -4019,7 +4063,7 @@
                 <a:latin typeface="Times New Roman" panose="02020603050405020304" pitchFamily="18" charset="0"/>
                 <a:cs typeface="Times New Roman" panose="02020603050405020304" pitchFamily="18" charset="0"/>
               </a:rPr>
-              <a:t>Настройка критериев</a:t>
+              <a:t>Создание теста и публикация</a:t>
             </a:r>
           </a:p>
         </p:txBody>
@@ -4061,10 +4105,10 @@
       </p:sp>
       <p:pic>
         <p:nvPicPr>
-          <p:cNvPr id="5" name="Рисунок 4">
-            <a:extLst>
-              <a:ext uri="{FF2B5EF4-FFF2-40B4-BE49-F238E27FC236}">
-                <a16:creationId xmlns:a16="http://schemas.microsoft.com/office/drawing/2014/main" id="{75414B8D-649B-29F2-7C50-01D781C5717E}"/>
+          <p:cNvPr id="8" name="Рисунок 7">
+            <a:extLst>
+              <a:ext uri="{FF2B5EF4-FFF2-40B4-BE49-F238E27FC236}">
+                <a16:creationId xmlns:a16="http://schemas.microsoft.com/office/drawing/2014/main" id="{0CBC98B6-9C84-8E4A-1FF9-EC0521E39CD6}"/>
               </a:ext>
             </a:extLst>
           </p:cNvPr>
@@ -4081,8 +4125,8 @@
         </p:blipFill>
         <p:spPr>
           <a:xfrm>
-            <a:off x="2391305" y="1171260"/>
-            <a:ext cx="7668695" cy="4515480"/>
+            <a:off x="555052" y="939622"/>
+            <a:ext cx="10541314" cy="5185486"/>
           </a:xfrm>
           <a:prstGeom prst="rect">
             <a:avLst/>
@@ -4092,7 +4136,7 @@
     </p:spTree>
     <p:extLst>
       <p:ext uri="{BB962C8B-B14F-4D97-AF65-F5344CB8AC3E}">
-        <p14:creationId xmlns:p14="http://schemas.microsoft.com/office/powerpoint/2010/main" val="2121109878"/>
+        <p14:creationId xmlns:p14="http://schemas.microsoft.com/office/powerpoint/2010/main" val="2427236525"/>
       </p:ext>
     </p:extLst>
   </p:cSld>
@@ -4153,7 +4197,7 @@
                 <a:latin typeface="Times New Roman" panose="02020603050405020304" pitchFamily="18" charset="0"/>
                 <a:cs typeface="Times New Roman" panose="02020603050405020304" pitchFamily="18" charset="0"/>
               </a:rPr>
-              <a:t>Прохождение теста и результаты</a:t>
+              <a:t>Создание теста и публикация</a:t>
             </a:r>
           </a:p>
         </p:txBody>
@@ -4195,10 +4239,10 @@
       </p:sp>
       <p:pic>
         <p:nvPicPr>
-          <p:cNvPr id="3" name="Рисунок 2">
-            <a:extLst>
-              <a:ext uri="{FF2B5EF4-FFF2-40B4-BE49-F238E27FC236}">
-                <a16:creationId xmlns:a16="http://schemas.microsoft.com/office/drawing/2014/main" id="{D77429FE-0BB1-9E95-CED9-12B2BE893D62}"/>
+          <p:cNvPr id="7" name="Рисунок 6">
+            <a:extLst>
+              <a:ext uri="{FF2B5EF4-FFF2-40B4-BE49-F238E27FC236}">
+                <a16:creationId xmlns:a16="http://schemas.microsoft.com/office/drawing/2014/main" id="{D44048C1-D1F2-C830-ED9F-E3325A0E9105}"/>
               </a:ext>
             </a:extLst>
           </p:cNvPr>
@@ -4215,38 +4259,8 @@
         </p:blipFill>
         <p:spPr>
           <a:xfrm>
-            <a:off x="340056" y="1152450"/>
-            <a:ext cx="4455994" cy="5442783"/>
-          </a:xfrm>
-          <a:prstGeom prst="rect">
-            <a:avLst/>
-          </a:prstGeom>
-        </p:spPr>
-      </p:pic>
-      <p:pic>
-        <p:nvPicPr>
-          <p:cNvPr id="6" name="Рисунок 5">
-            <a:extLst>
-              <a:ext uri="{FF2B5EF4-FFF2-40B4-BE49-F238E27FC236}">
-                <a16:creationId xmlns:a16="http://schemas.microsoft.com/office/drawing/2014/main" id="{C7C638A7-4FC3-4914-22B4-7550CB8FA71D}"/>
-              </a:ext>
-            </a:extLst>
-          </p:cNvPr>
-          <p:cNvPicPr>
-            <a:picLocks noChangeAspect="1"/>
-          </p:cNvPicPr>
-          <p:nvPr/>
-        </p:nvPicPr>
-        <p:blipFill>
-          <a:blip r:embed="rId3"/>
-          <a:stretch>
-            <a:fillRect/>
-          </a:stretch>
-        </p:blipFill>
-        <p:spPr>
-          <a:xfrm>
-            <a:off x="4941627" y="2582521"/>
-            <a:ext cx="6953535" cy="1692957"/>
+            <a:off x="2320119" y="849726"/>
+            <a:ext cx="7502640" cy="5810351"/>
           </a:xfrm>
           <a:prstGeom prst="rect">
             <a:avLst/>
@@ -4256,7 +4270,7 @@
     </p:spTree>
     <p:extLst>
       <p:ext uri="{BB962C8B-B14F-4D97-AF65-F5344CB8AC3E}">
-        <p14:creationId xmlns:p14="http://schemas.microsoft.com/office/powerpoint/2010/main" val="3354000135"/>
+        <p14:creationId xmlns:p14="http://schemas.microsoft.com/office/powerpoint/2010/main" val="1599161247"/>
       </p:ext>
     </p:extLst>
   </p:cSld>
@@ -4317,7 +4331,7 @@
                 <a:latin typeface="Times New Roman" panose="02020603050405020304" pitchFamily="18" charset="0"/>
                 <a:cs typeface="Times New Roman" panose="02020603050405020304" pitchFamily="18" charset="0"/>
               </a:rPr>
-              <a:t>Отчёт по тесту для преподавателя</a:t>
+              <a:t>Настройка критериев</a:t>
             </a:r>
           </a:p>
         </p:txBody>
@@ -4359,10 +4373,10 @@
       </p:sp>
       <p:pic>
         <p:nvPicPr>
-          <p:cNvPr id="7" name="Рисунок 6">
-            <a:extLst>
-              <a:ext uri="{FF2B5EF4-FFF2-40B4-BE49-F238E27FC236}">
-                <a16:creationId xmlns:a16="http://schemas.microsoft.com/office/drawing/2014/main" id="{1C818E01-2A7F-B622-2F62-A4A5963A27D2}"/>
+          <p:cNvPr id="6" name="Рисунок 5">
+            <a:extLst>
+              <a:ext uri="{FF2B5EF4-FFF2-40B4-BE49-F238E27FC236}">
+                <a16:creationId xmlns:a16="http://schemas.microsoft.com/office/drawing/2014/main" id="{289C1179-F9EA-B15B-E67A-18A6998F0921}"/>
               </a:ext>
             </a:extLst>
           </p:cNvPr>
@@ -4379,38 +4393,8 @@
         </p:blipFill>
         <p:spPr>
           <a:xfrm>
-            <a:off x="316954" y="1126954"/>
-            <a:ext cx="6026199" cy="5485386"/>
-          </a:xfrm>
-          <a:prstGeom prst="rect">
-            <a:avLst/>
-          </a:prstGeom>
-        </p:spPr>
-      </p:pic>
-      <p:pic>
-        <p:nvPicPr>
-          <p:cNvPr id="9" name="Рисунок 8">
-            <a:extLst>
-              <a:ext uri="{FF2B5EF4-FFF2-40B4-BE49-F238E27FC236}">
-                <a16:creationId xmlns:a16="http://schemas.microsoft.com/office/drawing/2014/main" id="{29162B45-AE23-F89C-CB4A-695212D59C74}"/>
-              </a:ext>
-            </a:extLst>
-          </p:cNvPr>
-          <p:cNvPicPr>
-            <a:picLocks noChangeAspect="1"/>
-          </p:cNvPicPr>
-          <p:nvPr/>
-        </p:nvPicPr>
-        <p:blipFill>
-          <a:blip r:embed="rId3"/>
-          <a:stretch>
-            <a:fillRect/>
-          </a:stretch>
-        </p:blipFill>
-        <p:spPr>
-          <a:xfrm>
-            <a:off x="6605516" y="1090923"/>
-            <a:ext cx="3777147" cy="5451165"/>
+            <a:off x="1864562" y="996812"/>
+            <a:ext cx="8462876" cy="4864376"/>
           </a:xfrm>
           <a:prstGeom prst="rect">
             <a:avLst/>
@@ -4420,7 +4404,7 @@
     </p:spTree>
     <p:extLst>
       <p:ext uri="{BB962C8B-B14F-4D97-AF65-F5344CB8AC3E}">
-        <p14:creationId xmlns:p14="http://schemas.microsoft.com/office/powerpoint/2010/main" val="3988948833"/>
+        <p14:creationId xmlns:p14="http://schemas.microsoft.com/office/powerpoint/2010/main" val="2121109878"/>
       </p:ext>
     </p:extLst>
   </p:cSld>
@@ -4447,12 +4431,759 @@
           <a:chExt cx="0" cy="0"/>
         </a:xfrm>
       </p:grpSpPr>
+      <p:sp>
+        <p:nvSpPr>
+          <p:cNvPr id="2" name="Заголовок 1">
+            <a:extLst>
+              <a:ext uri="{FF2B5EF4-FFF2-40B4-BE49-F238E27FC236}">
+                <a16:creationId xmlns:a16="http://schemas.microsoft.com/office/drawing/2014/main" id="{620C646A-788F-4874-840A-A52EEC59321A}"/>
+              </a:ext>
+            </a:extLst>
+          </p:cNvPr>
+          <p:cNvSpPr>
+            <a:spLocks noGrp="1"/>
+          </p:cNvSpPr>
+          <p:nvPr>
+            <p:ph type="title"/>
+          </p:nvPr>
+        </p:nvSpPr>
+        <p:spPr>
+          <a:xfrm>
+            <a:off x="838200" y="365126"/>
+            <a:ext cx="10515600" cy="522642"/>
+          </a:xfrm>
+        </p:spPr>
+        <p:txBody>
+          <a:bodyPr>
+            <a:noAutofit/>
+          </a:bodyPr>
+          <a:lstStyle/>
+          <a:p>
+            <a:pPr algn="ctr"/>
+            <a:r>
+              <a:rPr lang="ru-RU" sz="3200" dirty="0">
+                <a:latin typeface="Times New Roman" panose="02020603050405020304" pitchFamily="18" charset="0"/>
+                <a:cs typeface="Times New Roman" panose="02020603050405020304" pitchFamily="18" charset="0"/>
+              </a:rPr>
+              <a:t>Прохождение теста и результаты</a:t>
+            </a:r>
+          </a:p>
+        </p:txBody>
+      </p:sp>
+      <p:sp>
+        <p:nvSpPr>
+          <p:cNvPr id="4" name="Номер слайда 3">
+            <a:extLst>
+              <a:ext uri="{FF2B5EF4-FFF2-40B4-BE49-F238E27FC236}">
+                <a16:creationId xmlns:a16="http://schemas.microsoft.com/office/drawing/2014/main" id="{36742D18-EF0F-2CCA-3B72-38030B27FBCC}"/>
+              </a:ext>
+            </a:extLst>
+          </p:cNvPr>
+          <p:cNvSpPr>
+            <a:spLocks noGrp="1"/>
+          </p:cNvSpPr>
+          <p:nvPr>
+            <p:ph type="sldNum" sz="quarter" idx="12"/>
+          </p:nvPr>
+        </p:nvSpPr>
+        <p:spPr>
+          <a:xfrm>
+            <a:off x="8610600" y="6176963"/>
+            <a:ext cx="2743200" cy="365125"/>
+          </a:xfrm>
+        </p:spPr>
+        <p:txBody>
+          <a:bodyPr/>
+          <a:lstStyle/>
+          <a:p>
+            <a:fld id="{40CEF85B-4928-4330-BA98-C984623441A6}" type="slidenum">
+              <a:rPr lang="ru-RU" sz="4400" smtClean="0"/>
+              <a:pPr/>
+              <a:t>15</a:t>
+            </a:fld>
+            <a:endParaRPr lang="ru-RU" sz="4400" dirty="0"/>
+          </a:p>
+        </p:txBody>
+      </p:sp>
       <p:pic>
         <p:nvPicPr>
-          <p:cNvPr id="13" name="Рисунок 12" descr="Изображение выглядит как шаблон, прямоугольный, пиксель, дизайн&#10;&#10;Контент, сгенерированный ИИ, может содержать ошибки.">
-            <a:extLst>
-              <a:ext uri="{FF2B5EF4-FFF2-40B4-BE49-F238E27FC236}">
-                <a16:creationId xmlns:a16="http://schemas.microsoft.com/office/drawing/2014/main" id="{AE1A1C7A-76EF-6F72-076C-62DEB7283110}"/>
+          <p:cNvPr id="3" name="Рисунок 2">
+            <a:extLst>
+              <a:ext uri="{FF2B5EF4-FFF2-40B4-BE49-F238E27FC236}">
+                <a16:creationId xmlns:a16="http://schemas.microsoft.com/office/drawing/2014/main" id="{D77429FE-0BB1-9E95-CED9-12B2BE893D62}"/>
+              </a:ext>
+            </a:extLst>
+          </p:cNvPr>
+          <p:cNvPicPr>
+            <a:picLocks noChangeAspect="1"/>
+          </p:cNvPicPr>
+          <p:nvPr/>
+        </p:nvPicPr>
+        <p:blipFill>
+          <a:blip r:embed="rId2"/>
+          <a:stretch>
+            <a:fillRect/>
+          </a:stretch>
+        </p:blipFill>
+        <p:spPr>
+          <a:xfrm>
+            <a:off x="340056" y="1152450"/>
+            <a:ext cx="4455994" cy="5442783"/>
+          </a:xfrm>
+          <a:prstGeom prst="rect">
+            <a:avLst/>
+          </a:prstGeom>
+          <a:ln w="12700">
+            <a:solidFill>
+              <a:schemeClr val="tx1"/>
+            </a:solidFill>
+          </a:ln>
+        </p:spPr>
+      </p:pic>
+      <p:pic>
+        <p:nvPicPr>
+          <p:cNvPr id="6" name="Рисунок 5">
+            <a:extLst>
+              <a:ext uri="{FF2B5EF4-FFF2-40B4-BE49-F238E27FC236}">
+                <a16:creationId xmlns:a16="http://schemas.microsoft.com/office/drawing/2014/main" id="{C7C638A7-4FC3-4914-22B4-7550CB8FA71D}"/>
+              </a:ext>
+            </a:extLst>
+          </p:cNvPr>
+          <p:cNvPicPr>
+            <a:picLocks noChangeAspect="1"/>
+          </p:cNvPicPr>
+          <p:nvPr/>
+        </p:nvPicPr>
+        <p:blipFill>
+          <a:blip r:embed="rId3"/>
+          <a:stretch>
+            <a:fillRect/>
+          </a:stretch>
+        </p:blipFill>
+        <p:spPr>
+          <a:xfrm>
+            <a:off x="4941627" y="2582521"/>
+            <a:ext cx="6953535" cy="1692957"/>
+          </a:xfrm>
+          <a:prstGeom prst="rect">
+            <a:avLst/>
+          </a:prstGeom>
+          <a:ln w="12700">
+            <a:solidFill>
+              <a:schemeClr val="tx1"/>
+            </a:solidFill>
+          </a:ln>
+        </p:spPr>
+      </p:pic>
+    </p:spTree>
+    <p:extLst>
+      <p:ext uri="{BB962C8B-B14F-4D97-AF65-F5344CB8AC3E}">
+        <p14:creationId xmlns:p14="http://schemas.microsoft.com/office/powerpoint/2010/main" val="3354000135"/>
+      </p:ext>
+    </p:extLst>
+  </p:cSld>
+  <p:clrMapOvr>
+    <a:masterClrMapping/>
+  </p:clrMapOvr>
+</p:sld>
+</file>
+
+<file path=ppt/slides/slide16.xml><?xml version="1.0" encoding="utf-8"?>
+<p:sld xmlns:a="http://schemas.openxmlformats.org/drawingml/2006/main" xmlns:r="http://schemas.openxmlformats.org/officeDocument/2006/relationships" xmlns:p="http://schemas.openxmlformats.org/presentationml/2006/main">
+  <p:cSld>
+    <p:spTree>
+      <p:nvGrpSpPr>
+        <p:cNvPr id="1" name=""/>
+        <p:cNvGrpSpPr/>
+        <p:nvPr/>
+      </p:nvGrpSpPr>
+      <p:grpSpPr>
+        <a:xfrm>
+          <a:off x="0" y="0"/>
+          <a:ext cx="0" cy="0"/>
+          <a:chOff x="0" y="0"/>
+          <a:chExt cx="0" cy="0"/>
+        </a:xfrm>
+      </p:grpSpPr>
+      <p:sp>
+        <p:nvSpPr>
+          <p:cNvPr id="2" name="Заголовок 1">
+            <a:extLst>
+              <a:ext uri="{FF2B5EF4-FFF2-40B4-BE49-F238E27FC236}">
+                <a16:creationId xmlns:a16="http://schemas.microsoft.com/office/drawing/2014/main" id="{620C646A-788F-4874-840A-A52EEC59321A}"/>
+              </a:ext>
+            </a:extLst>
+          </p:cNvPr>
+          <p:cNvSpPr>
+            <a:spLocks noGrp="1"/>
+          </p:cNvSpPr>
+          <p:nvPr>
+            <p:ph type="title"/>
+          </p:nvPr>
+        </p:nvSpPr>
+        <p:spPr>
+          <a:xfrm>
+            <a:off x="838200" y="365126"/>
+            <a:ext cx="10515600" cy="522642"/>
+          </a:xfrm>
+        </p:spPr>
+        <p:txBody>
+          <a:bodyPr>
+            <a:noAutofit/>
+          </a:bodyPr>
+          <a:lstStyle/>
+          <a:p>
+            <a:pPr algn="ctr"/>
+            <a:r>
+              <a:rPr lang="ru-RU" sz="3200" dirty="0">
+                <a:latin typeface="Times New Roman" panose="02020603050405020304" pitchFamily="18" charset="0"/>
+                <a:cs typeface="Times New Roman" panose="02020603050405020304" pitchFamily="18" charset="0"/>
+              </a:rPr>
+              <a:t>Отчёт по тесту для преподавателя</a:t>
+            </a:r>
+          </a:p>
+        </p:txBody>
+      </p:sp>
+      <p:sp>
+        <p:nvSpPr>
+          <p:cNvPr id="4" name="Номер слайда 3">
+            <a:extLst>
+              <a:ext uri="{FF2B5EF4-FFF2-40B4-BE49-F238E27FC236}">
+                <a16:creationId xmlns:a16="http://schemas.microsoft.com/office/drawing/2014/main" id="{36742D18-EF0F-2CCA-3B72-38030B27FBCC}"/>
+              </a:ext>
+            </a:extLst>
+          </p:cNvPr>
+          <p:cNvSpPr>
+            <a:spLocks noGrp="1"/>
+          </p:cNvSpPr>
+          <p:nvPr>
+            <p:ph type="sldNum" sz="quarter" idx="12"/>
+          </p:nvPr>
+        </p:nvSpPr>
+        <p:spPr>
+          <a:xfrm>
+            <a:off x="8610600" y="6176963"/>
+            <a:ext cx="2743200" cy="365125"/>
+          </a:xfrm>
+        </p:spPr>
+        <p:txBody>
+          <a:bodyPr/>
+          <a:lstStyle/>
+          <a:p>
+            <a:fld id="{40CEF85B-4928-4330-BA98-C984623441A6}" type="slidenum">
+              <a:rPr lang="ru-RU" sz="4400" smtClean="0"/>
+              <a:pPr/>
+              <a:t>16</a:t>
+            </a:fld>
+            <a:endParaRPr lang="ru-RU" sz="4400" dirty="0"/>
+          </a:p>
+        </p:txBody>
+      </p:sp>
+      <p:pic>
+        <p:nvPicPr>
+          <p:cNvPr id="7" name="Рисунок 6">
+            <a:extLst>
+              <a:ext uri="{FF2B5EF4-FFF2-40B4-BE49-F238E27FC236}">
+                <a16:creationId xmlns:a16="http://schemas.microsoft.com/office/drawing/2014/main" id="{1C818E01-2A7F-B622-2F62-A4A5963A27D2}"/>
+              </a:ext>
+            </a:extLst>
+          </p:cNvPr>
+          <p:cNvPicPr>
+            <a:picLocks noChangeAspect="1"/>
+          </p:cNvPicPr>
+          <p:nvPr/>
+        </p:nvPicPr>
+        <p:blipFill>
+          <a:blip r:embed="rId2"/>
+          <a:srcRect l="2440" t="1973" r="1082" b="2178"/>
+          <a:stretch/>
+        </p:blipFill>
+        <p:spPr>
+          <a:xfrm>
+            <a:off x="464023" y="1235121"/>
+            <a:ext cx="5813947" cy="5257753"/>
+          </a:xfrm>
+          <a:prstGeom prst="rect">
+            <a:avLst/>
+          </a:prstGeom>
+          <a:ln w="12700">
+            <a:solidFill>
+              <a:schemeClr val="tx1"/>
+            </a:solidFill>
+          </a:ln>
+        </p:spPr>
+      </p:pic>
+      <p:pic>
+        <p:nvPicPr>
+          <p:cNvPr id="9" name="Рисунок 8">
+            <a:extLst>
+              <a:ext uri="{FF2B5EF4-FFF2-40B4-BE49-F238E27FC236}">
+                <a16:creationId xmlns:a16="http://schemas.microsoft.com/office/drawing/2014/main" id="{29162B45-AE23-F89C-CB4A-695212D59C74}"/>
+              </a:ext>
+            </a:extLst>
+          </p:cNvPr>
+          <p:cNvPicPr>
+            <a:picLocks noChangeAspect="1"/>
+          </p:cNvPicPr>
+          <p:nvPr/>
+        </p:nvPicPr>
+        <p:blipFill>
+          <a:blip r:embed="rId3"/>
+          <a:srcRect l="1444" t="1017" r="1359" b="903"/>
+          <a:stretch/>
+        </p:blipFill>
+        <p:spPr>
+          <a:xfrm>
+            <a:off x="6660107" y="1146412"/>
+            <a:ext cx="3671248" cy="5346462"/>
+          </a:xfrm>
+          <a:prstGeom prst="rect">
+            <a:avLst/>
+          </a:prstGeom>
+          <a:ln w="12700">
+            <a:solidFill>
+              <a:schemeClr val="tx1"/>
+            </a:solidFill>
+          </a:ln>
+        </p:spPr>
+      </p:pic>
+    </p:spTree>
+    <p:extLst>
+      <p:ext uri="{BB962C8B-B14F-4D97-AF65-F5344CB8AC3E}">
+        <p14:creationId xmlns:p14="http://schemas.microsoft.com/office/powerpoint/2010/main" val="3988948833"/>
+      </p:ext>
+    </p:extLst>
+  </p:cSld>
+  <p:clrMapOvr>
+    <a:masterClrMapping/>
+  </p:clrMapOvr>
+</p:sld>
+</file>
+
+<file path=ppt/slides/slide17.xml><?xml version="1.0" encoding="utf-8"?>
+<p:sld xmlns:a="http://schemas.openxmlformats.org/drawingml/2006/main" xmlns:r="http://schemas.openxmlformats.org/officeDocument/2006/relationships" xmlns:p="http://schemas.openxmlformats.org/presentationml/2006/main">
+  <p:cSld>
+    <p:spTree>
+      <p:nvGrpSpPr>
+        <p:cNvPr id="1" name=""/>
+        <p:cNvGrpSpPr/>
+        <p:nvPr/>
+      </p:nvGrpSpPr>
+      <p:grpSpPr>
+        <a:xfrm>
+          <a:off x="0" y="0"/>
+          <a:ext cx="0" cy="0"/>
+          <a:chOff x="0" y="0"/>
+          <a:chExt cx="0" cy="0"/>
+        </a:xfrm>
+      </p:grpSpPr>
+      <p:sp>
+        <p:nvSpPr>
+          <p:cNvPr id="2" name="Заголовок 1">
+            <a:extLst>
+              <a:ext uri="{FF2B5EF4-FFF2-40B4-BE49-F238E27FC236}">
+                <a16:creationId xmlns:a16="http://schemas.microsoft.com/office/drawing/2014/main" id="{620C646A-788F-4874-840A-A52EEC59321A}"/>
+              </a:ext>
+            </a:extLst>
+          </p:cNvPr>
+          <p:cNvSpPr>
+            <a:spLocks noGrp="1"/>
+          </p:cNvSpPr>
+          <p:nvPr>
+            <p:ph type="title"/>
+          </p:nvPr>
+        </p:nvSpPr>
+        <p:spPr>
+          <a:xfrm>
+            <a:off x="838200" y="365126"/>
+            <a:ext cx="10515600" cy="522642"/>
+          </a:xfrm>
+        </p:spPr>
+        <p:txBody>
+          <a:bodyPr>
+            <a:noAutofit/>
+          </a:bodyPr>
+          <a:lstStyle/>
+          <a:p>
+            <a:pPr algn="ctr"/>
+            <a:r>
+              <a:rPr lang="ru-RU" sz="3200" dirty="0">
+                <a:latin typeface="Times New Roman" panose="02020603050405020304" pitchFamily="18" charset="0"/>
+                <a:cs typeface="Times New Roman" panose="02020603050405020304" pitchFamily="18" charset="0"/>
+              </a:rPr>
+              <a:t>Десктопное приложение</a:t>
+            </a:r>
+          </a:p>
+        </p:txBody>
+      </p:sp>
+      <p:sp>
+        <p:nvSpPr>
+          <p:cNvPr id="4" name="Номер слайда 3">
+            <a:extLst>
+              <a:ext uri="{FF2B5EF4-FFF2-40B4-BE49-F238E27FC236}">
+                <a16:creationId xmlns:a16="http://schemas.microsoft.com/office/drawing/2014/main" id="{36742D18-EF0F-2CCA-3B72-38030B27FBCC}"/>
+              </a:ext>
+            </a:extLst>
+          </p:cNvPr>
+          <p:cNvSpPr>
+            <a:spLocks noGrp="1"/>
+          </p:cNvSpPr>
+          <p:nvPr>
+            <p:ph type="sldNum" sz="quarter" idx="12"/>
+          </p:nvPr>
+        </p:nvSpPr>
+        <p:spPr>
+          <a:xfrm>
+            <a:off x="8610600" y="6176963"/>
+            <a:ext cx="2743200" cy="365125"/>
+          </a:xfrm>
+        </p:spPr>
+        <p:txBody>
+          <a:bodyPr/>
+          <a:lstStyle/>
+          <a:p>
+            <a:fld id="{40CEF85B-4928-4330-BA98-C984623441A6}" type="slidenum">
+              <a:rPr lang="ru-RU" sz="4400" smtClean="0"/>
+              <a:pPr/>
+              <a:t>17</a:t>
+            </a:fld>
+            <a:endParaRPr lang="ru-RU" sz="4400" dirty="0"/>
+          </a:p>
+        </p:txBody>
+      </p:sp>
+      <p:pic>
+        <p:nvPicPr>
+          <p:cNvPr id="5" name="Рисунок 4">
+            <a:extLst>
+              <a:ext uri="{FF2B5EF4-FFF2-40B4-BE49-F238E27FC236}">
+                <a16:creationId xmlns:a16="http://schemas.microsoft.com/office/drawing/2014/main" id="{07566C87-0163-A6AB-F6A5-0591A6F9D3CB}"/>
+              </a:ext>
+            </a:extLst>
+          </p:cNvPr>
+          <p:cNvPicPr>
+            <a:picLocks noChangeAspect="1"/>
+          </p:cNvPicPr>
+          <p:nvPr/>
+        </p:nvPicPr>
+        <p:blipFill>
+          <a:blip r:embed="rId2"/>
+          <a:stretch>
+            <a:fillRect/>
+          </a:stretch>
+        </p:blipFill>
+        <p:spPr>
+          <a:xfrm>
+            <a:off x="744940" y="1631231"/>
+            <a:ext cx="5351060" cy="3595537"/>
+          </a:xfrm>
+          <a:prstGeom prst="rect">
+            <a:avLst/>
+          </a:prstGeom>
+        </p:spPr>
+      </p:pic>
+      <p:pic>
+        <p:nvPicPr>
+          <p:cNvPr id="8" name="Рисунок 7">
+            <a:extLst>
+              <a:ext uri="{FF2B5EF4-FFF2-40B4-BE49-F238E27FC236}">
+                <a16:creationId xmlns:a16="http://schemas.microsoft.com/office/drawing/2014/main" id="{CBD4B89E-323B-4267-ECD5-63215BC1702A}"/>
+              </a:ext>
+            </a:extLst>
+          </p:cNvPr>
+          <p:cNvPicPr>
+            <a:picLocks noChangeAspect="1"/>
+          </p:cNvPicPr>
+          <p:nvPr/>
+        </p:nvPicPr>
+        <p:blipFill>
+          <a:blip r:embed="rId3"/>
+          <a:stretch>
+            <a:fillRect/>
+          </a:stretch>
+        </p:blipFill>
+        <p:spPr>
+          <a:xfrm>
+            <a:off x="6414448" y="1362770"/>
+            <a:ext cx="4832509" cy="4386958"/>
+          </a:xfrm>
+          <a:prstGeom prst="rect">
+            <a:avLst/>
+          </a:prstGeom>
+        </p:spPr>
+      </p:pic>
+    </p:spTree>
+    <p:extLst>
+      <p:ext uri="{BB962C8B-B14F-4D97-AF65-F5344CB8AC3E}">
+        <p14:creationId xmlns:p14="http://schemas.microsoft.com/office/powerpoint/2010/main" val="2039859198"/>
+      </p:ext>
+    </p:extLst>
+  </p:cSld>
+  <p:clrMapOvr>
+    <a:masterClrMapping/>
+  </p:clrMapOvr>
+</p:sld>
+</file>
+
+<file path=ppt/slides/slide18.xml><?xml version="1.0" encoding="utf-8"?>
+<p:sld xmlns:a="http://schemas.openxmlformats.org/drawingml/2006/main" xmlns:r="http://schemas.openxmlformats.org/officeDocument/2006/relationships" xmlns:p="http://schemas.openxmlformats.org/presentationml/2006/main">
+  <p:cSld>
+    <p:spTree>
+      <p:nvGrpSpPr>
+        <p:cNvPr id="1" name=""/>
+        <p:cNvGrpSpPr/>
+        <p:nvPr/>
+      </p:nvGrpSpPr>
+      <p:grpSpPr>
+        <a:xfrm>
+          <a:off x="0" y="0"/>
+          <a:ext cx="0" cy="0"/>
+          <a:chOff x="0" y="0"/>
+          <a:chExt cx="0" cy="0"/>
+        </a:xfrm>
+      </p:grpSpPr>
+      <p:sp>
+        <p:nvSpPr>
+          <p:cNvPr id="2" name="Заголовок 1">
+            <a:extLst>
+              <a:ext uri="{FF2B5EF4-FFF2-40B4-BE49-F238E27FC236}">
+                <a16:creationId xmlns:a16="http://schemas.microsoft.com/office/drawing/2014/main" id="{620C646A-788F-4874-840A-A52EEC59321A}"/>
+              </a:ext>
+            </a:extLst>
+          </p:cNvPr>
+          <p:cNvSpPr>
+            <a:spLocks noGrp="1"/>
+          </p:cNvSpPr>
+          <p:nvPr>
+            <p:ph type="title"/>
+          </p:nvPr>
+        </p:nvSpPr>
+        <p:spPr>
+          <a:xfrm>
+            <a:off x="838200" y="365126"/>
+            <a:ext cx="10515600" cy="522642"/>
+          </a:xfrm>
+        </p:spPr>
+        <p:txBody>
+          <a:bodyPr>
+            <a:noAutofit/>
+          </a:bodyPr>
+          <a:lstStyle/>
+          <a:p>
+            <a:pPr algn="ctr"/>
+            <a:r>
+              <a:rPr lang="ru-RU" sz="3200" dirty="0">
+                <a:latin typeface="Times New Roman" panose="02020603050405020304" pitchFamily="18" charset="0"/>
+                <a:cs typeface="Times New Roman" panose="02020603050405020304" pitchFamily="18" charset="0"/>
+              </a:rPr>
+              <a:t>Десктопное приложение</a:t>
+            </a:r>
+          </a:p>
+        </p:txBody>
+      </p:sp>
+      <p:sp>
+        <p:nvSpPr>
+          <p:cNvPr id="4" name="Номер слайда 3">
+            <a:extLst>
+              <a:ext uri="{FF2B5EF4-FFF2-40B4-BE49-F238E27FC236}">
+                <a16:creationId xmlns:a16="http://schemas.microsoft.com/office/drawing/2014/main" id="{36742D18-EF0F-2CCA-3B72-38030B27FBCC}"/>
+              </a:ext>
+            </a:extLst>
+          </p:cNvPr>
+          <p:cNvSpPr>
+            <a:spLocks noGrp="1"/>
+          </p:cNvSpPr>
+          <p:nvPr>
+            <p:ph type="sldNum" sz="quarter" idx="12"/>
+          </p:nvPr>
+        </p:nvSpPr>
+        <p:spPr>
+          <a:xfrm>
+            <a:off x="8610600" y="6176963"/>
+            <a:ext cx="2743200" cy="365125"/>
+          </a:xfrm>
+        </p:spPr>
+        <p:txBody>
+          <a:bodyPr/>
+          <a:lstStyle/>
+          <a:p>
+            <a:fld id="{40CEF85B-4928-4330-BA98-C984623441A6}" type="slidenum">
+              <a:rPr lang="ru-RU" sz="4400" smtClean="0"/>
+              <a:pPr/>
+              <a:t>18</a:t>
+            </a:fld>
+            <a:endParaRPr lang="ru-RU" sz="4400" dirty="0"/>
+          </a:p>
+        </p:txBody>
+      </p:sp>
+      <p:pic>
+        <p:nvPicPr>
+          <p:cNvPr id="6" name="Рисунок 5">
+            <a:extLst>
+              <a:ext uri="{FF2B5EF4-FFF2-40B4-BE49-F238E27FC236}">
+                <a16:creationId xmlns:a16="http://schemas.microsoft.com/office/drawing/2014/main" id="{8773DEAB-952A-A8F4-B56D-31A7319B4FB5}"/>
+              </a:ext>
+            </a:extLst>
+          </p:cNvPr>
+          <p:cNvPicPr>
+            <a:picLocks noChangeAspect="1"/>
+          </p:cNvPicPr>
+          <p:nvPr/>
+        </p:nvPicPr>
+        <p:blipFill>
+          <a:blip r:embed="rId2"/>
+          <a:srcRect r="2324"/>
+          <a:stretch/>
+        </p:blipFill>
+        <p:spPr>
+          <a:xfrm>
+            <a:off x="310265" y="887768"/>
+            <a:ext cx="5735693" cy="5796434"/>
+          </a:xfrm>
+          <a:prstGeom prst="rect">
+            <a:avLst/>
+          </a:prstGeom>
+        </p:spPr>
+      </p:pic>
+      <p:pic>
+        <p:nvPicPr>
+          <p:cNvPr id="9" name="Рисунок 8">
+            <a:extLst>
+              <a:ext uri="{FF2B5EF4-FFF2-40B4-BE49-F238E27FC236}">
+                <a16:creationId xmlns:a16="http://schemas.microsoft.com/office/drawing/2014/main" id="{E877DAD2-CDAD-40D0-1BBD-B0C1456B2EE0}"/>
+              </a:ext>
+            </a:extLst>
+          </p:cNvPr>
+          <p:cNvPicPr>
+            <a:picLocks noChangeAspect="1"/>
+          </p:cNvPicPr>
+          <p:nvPr/>
+        </p:nvPicPr>
+        <p:blipFill>
+          <a:blip r:embed="rId3"/>
+          <a:stretch>
+            <a:fillRect/>
+          </a:stretch>
+        </p:blipFill>
+        <p:spPr>
+          <a:xfrm>
+            <a:off x="6741992" y="887561"/>
+            <a:ext cx="3582539" cy="5796641"/>
+          </a:xfrm>
+          <a:prstGeom prst="rect">
+            <a:avLst/>
+          </a:prstGeom>
+        </p:spPr>
+      </p:pic>
+    </p:spTree>
+    <p:extLst>
+      <p:ext uri="{BB962C8B-B14F-4D97-AF65-F5344CB8AC3E}">
+        <p14:creationId xmlns:p14="http://schemas.microsoft.com/office/powerpoint/2010/main" val="2798577867"/>
+      </p:ext>
+    </p:extLst>
+  </p:cSld>
+  <p:clrMapOvr>
+    <a:masterClrMapping/>
+  </p:clrMapOvr>
+</p:sld>
+</file>
+
+<file path=ppt/slides/slide19.xml><?xml version="1.0" encoding="utf-8"?>
+<p:sld xmlns:a="http://schemas.openxmlformats.org/drawingml/2006/main" xmlns:r="http://schemas.openxmlformats.org/officeDocument/2006/relationships" xmlns:p="http://schemas.openxmlformats.org/presentationml/2006/main">
+  <p:cSld>
+    <p:spTree>
+      <p:nvGrpSpPr>
+        <p:cNvPr id="1" name=""/>
+        <p:cNvGrpSpPr/>
+        <p:nvPr/>
+      </p:nvGrpSpPr>
+      <p:grpSpPr>
+        <a:xfrm>
+          <a:off x="0" y="0"/>
+          <a:ext cx="0" cy="0"/>
+          <a:chOff x="0" y="0"/>
+          <a:chExt cx="0" cy="0"/>
+        </a:xfrm>
+      </p:grpSpPr>
+      <p:sp>
+        <p:nvSpPr>
+          <p:cNvPr id="2" name="Заголовок 1">
+            <a:extLst>
+              <a:ext uri="{FF2B5EF4-FFF2-40B4-BE49-F238E27FC236}">
+                <a16:creationId xmlns:a16="http://schemas.microsoft.com/office/drawing/2014/main" id="{620C646A-788F-4874-840A-A52EEC59321A}"/>
+              </a:ext>
+            </a:extLst>
+          </p:cNvPr>
+          <p:cNvSpPr>
+            <a:spLocks noGrp="1"/>
+          </p:cNvSpPr>
+          <p:nvPr>
+            <p:ph type="title"/>
+          </p:nvPr>
+        </p:nvSpPr>
+        <p:spPr>
+          <a:xfrm>
+            <a:off x="788158" y="365126"/>
+            <a:ext cx="10515600" cy="522642"/>
+          </a:xfrm>
+        </p:spPr>
+        <p:txBody>
+          <a:bodyPr>
+            <a:noAutofit/>
+          </a:bodyPr>
+          <a:lstStyle/>
+          <a:p>
+            <a:pPr algn="ctr"/>
+            <a:r>
+              <a:rPr lang="ru-RU" sz="3200" dirty="0">
+                <a:latin typeface="Times New Roman" panose="02020603050405020304" pitchFamily="18" charset="0"/>
+                <a:cs typeface="Times New Roman" panose="02020603050405020304" pitchFamily="18" charset="0"/>
+              </a:rPr>
+              <a:t>Заключение</a:t>
+            </a:r>
+          </a:p>
+        </p:txBody>
+      </p:sp>
+      <p:sp>
+        <p:nvSpPr>
+          <p:cNvPr id="4" name="Номер слайда 3">
+            <a:extLst>
+              <a:ext uri="{FF2B5EF4-FFF2-40B4-BE49-F238E27FC236}">
+                <a16:creationId xmlns:a16="http://schemas.microsoft.com/office/drawing/2014/main" id="{36742D18-EF0F-2CCA-3B72-38030B27FBCC}"/>
+              </a:ext>
+            </a:extLst>
+          </p:cNvPr>
+          <p:cNvSpPr>
+            <a:spLocks noGrp="1"/>
+          </p:cNvSpPr>
+          <p:nvPr>
+            <p:ph type="sldNum" sz="quarter" idx="12"/>
+          </p:nvPr>
+        </p:nvSpPr>
+        <p:spPr>
+          <a:xfrm>
+            <a:off x="8610600" y="6176963"/>
+            <a:ext cx="2743200" cy="365125"/>
+          </a:xfrm>
+        </p:spPr>
+        <p:txBody>
+          <a:bodyPr/>
+          <a:lstStyle/>
+          <a:p>
+            <a:fld id="{40CEF85B-4928-4330-BA98-C984623441A6}" type="slidenum">
+              <a:rPr lang="ru-RU" sz="4400" smtClean="0"/>
+              <a:pPr/>
+              <a:t>19</a:t>
+            </a:fld>
+            <a:endParaRPr lang="ru-RU" sz="4400" dirty="0"/>
+          </a:p>
+        </p:txBody>
+      </p:sp>
+      <p:pic>
+        <p:nvPicPr>
+          <p:cNvPr id="3" name="Рисунок 2" descr="Изображение выглядит как шаблон, прямоугольный, пиксель, дизайн&#10;&#10;Контент, сгенерированный ИИ, может содержать ошибки.">
+            <a:extLst>
+              <a:ext uri="{FF2B5EF4-FFF2-40B4-BE49-F238E27FC236}">
+                <a16:creationId xmlns:a16="http://schemas.microsoft.com/office/drawing/2014/main" id="{32F50B01-A9A7-FB43-8190-94672ACD8CAB}"/>
               </a:ext>
             </a:extLst>
           </p:cNvPr>
@@ -4474,8 +5205,8 @@
         </p:blipFill>
         <p:spPr>
           <a:xfrm>
-            <a:off x="6543323" y="1147419"/>
-            <a:ext cx="4776717" cy="4769892"/>
+            <a:off x="4245848" y="1355929"/>
+            <a:ext cx="3131000" cy="3126527"/>
           </a:xfrm>
           <a:prstGeom prst="rect">
             <a:avLst/>
@@ -4484,10 +5215,10 @@
       </p:pic>
       <p:pic>
         <p:nvPicPr>
-          <p:cNvPr id="10" name="Рисунок 9" descr="Изображение выглядит как шаблон, прямоугольный, Симметрия, Графика&#10;&#10;Контент, сгенерированный ИИ, может содержать ошибки.">
-            <a:extLst>
-              <a:ext uri="{FF2B5EF4-FFF2-40B4-BE49-F238E27FC236}">
-                <a16:creationId xmlns:a16="http://schemas.microsoft.com/office/drawing/2014/main" id="{A9F16EB1-9E1F-078B-1627-F5379D19E30F}"/>
+          <p:cNvPr id="5" name="Рисунок 4" descr="Изображение выглядит как шаблон, прямоугольный, Симметрия, Графика&#10;&#10;Контент, сгенерированный ИИ, может содержать ошибки.">
+            <a:extLst>
+              <a:ext uri="{FF2B5EF4-FFF2-40B4-BE49-F238E27FC236}">
+                <a16:creationId xmlns:a16="http://schemas.microsoft.com/office/drawing/2014/main" id="{D53CB8DA-0CB1-1CAA-C4E5-2EDCC0850021}"/>
               </a:ext>
             </a:extLst>
           </p:cNvPr>
@@ -4509,8 +5240,8 @@
         </p:blipFill>
         <p:spPr>
           <a:xfrm>
-            <a:off x="871963" y="1147419"/>
-            <a:ext cx="4776716" cy="4769892"/>
+            <a:off x="450401" y="1355929"/>
+            <a:ext cx="3131000" cy="3126527"/>
           </a:xfrm>
           <a:prstGeom prst="rect">
             <a:avLst/>
@@ -4519,84 +5250,10 @@
       </p:pic>
       <p:sp>
         <p:nvSpPr>
-          <p:cNvPr id="2" name="Заголовок 1">
-            <a:extLst>
-              <a:ext uri="{FF2B5EF4-FFF2-40B4-BE49-F238E27FC236}">
-                <a16:creationId xmlns:a16="http://schemas.microsoft.com/office/drawing/2014/main" id="{620C646A-788F-4874-840A-A52EEC59321A}"/>
-              </a:ext>
-            </a:extLst>
-          </p:cNvPr>
-          <p:cNvSpPr>
-            <a:spLocks noGrp="1"/>
-          </p:cNvSpPr>
-          <p:nvPr>
-            <p:ph type="title"/>
-          </p:nvPr>
-        </p:nvSpPr>
-        <p:spPr>
-          <a:xfrm>
-            <a:off x="788158" y="365126"/>
-            <a:ext cx="10515600" cy="522642"/>
-          </a:xfrm>
-        </p:spPr>
-        <p:txBody>
-          <a:bodyPr>
-            <a:noAutofit/>
-          </a:bodyPr>
-          <a:lstStyle/>
-          <a:p>
-            <a:pPr algn="ctr"/>
-            <a:r>
-              <a:rPr lang="ru-RU" sz="3200" dirty="0">
-                <a:latin typeface="Times New Roman" panose="02020603050405020304" pitchFamily="18" charset="0"/>
-                <a:cs typeface="Times New Roman" panose="02020603050405020304" pitchFamily="18" charset="0"/>
-              </a:rPr>
-              <a:t>Заключение</a:t>
-            </a:r>
-          </a:p>
-        </p:txBody>
-      </p:sp>
-      <p:sp>
-        <p:nvSpPr>
-          <p:cNvPr id="4" name="Номер слайда 3">
-            <a:extLst>
-              <a:ext uri="{FF2B5EF4-FFF2-40B4-BE49-F238E27FC236}">
-                <a16:creationId xmlns:a16="http://schemas.microsoft.com/office/drawing/2014/main" id="{36742D18-EF0F-2CCA-3B72-38030B27FBCC}"/>
-              </a:ext>
-            </a:extLst>
-          </p:cNvPr>
-          <p:cNvSpPr>
-            <a:spLocks noGrp="1"/>
-          </p:cNvSpPr>
-          <p:nvPr>
-            <p:ph type="sldNum" sz="quarter" idx="12"/>
-          </p:nvPr>
-        </p:nvSpPr>
-        <p:spPr>
-          <a:xfrm>
-            <a:off x="8610600" y="6176963"/>
-            <a:ext cx="2743200" cy="365125"/>
-          </a:xfrm>
-        </p:spPr>
-        <p:txBody>
-          <a:bodyPr/>
-          <a:lstStyle/>
-          <a:p>
-            <a:fld id="{40CEF85B-4928-4330-BA98-C984623441A6}" type="slidenum">
-              <a:rPr lang="ru-RU" sz="4400" smtClean="0"/>
-              <a:pPr/>
-              <a:t>15</a:t>
-            </a:fld>
-            <a:endParaRPr lang="ru-RU" sz="4400" dirty="0"/>
-          </a:p>
-        </p:txBody>
-      </p:sp>
-      <p:sp>
-        <p:nvSpPr>
-          <p:cNvPr id="11" name="Заголовок 1">
-            <a:extLst>
-              <a:ext uri="{FF2B5EF4-FFF2-40B4-BE49-F238E27FC236}">
-                <a16:creationId xmlns:a16="http://schemas.microsoft.com/office/drawing/2014/main" id="{ED7ACEB9-8E4D-F6D4-E4FE-B07F76D7DDCA}"/>
+          <p:cNvPr id="6" name="Заголовок 1">
+            <a:extLst>
+              <a:ext uri="{FF2B5EF4-FFF2-40B4-BE49-F238E27FC236}">
+                <a16:creationId xmlns:a16="http://schemas.microsoft.com/office/drawing/2014/main" id="{DEB67087-1C57-7C17-EBAE-15E287F27D5B}"/>
               </a:ext>
             </a:extLst>
           </p:cNvPr>
@@ -4607,8 +5264,8 @@
         </p:nvSpPr>
         <p:spPr>
           <a:xfrm>
-            <a:off x="1035454" y="5978062"/>
-            <a:ext cx="4419743" cy="522642"/>
+            <a:off x="522041" y="4995260"/>
+            <a:ext cx="4150895" cy="1181703"/>
           </a:xfrm>
           <a:prstGeom prst="rect">
             <a:avLst/>
@@ -4638,23 +5295,39 @@
             </a:lvl1pPr>
           </a:lstStyle>
           <a:p>
-            <a:pPr algn="ctr"/>
-            <a:r>
-              <a:rPr lang="ru-RU" sz="2000" dirty="0">
+            <a:r>
+              <a:rPr lang="en-US" sz="2400" dirty="0">
                 <a:latin typeface="Times New Roman" panose="02020603050405020304" pitchFamily="18" charset="0"/>
                 <a:cs typeface="Times New Roman" panose="02020603050405020304" pitchFamily="18" charset="0"/>
               </a:rPr>
-              <a:t>Разработанная система</a:t>
-            </a:r>
-          </a:p>
-        </p:txBody>
-      </p:sp>
-      <p:sp>
-        <p:nvSpPr>
-          <p:cNvPr id="14" name="Заголовок 1">
-            <a:extLst>
-              <a:ext uri="{FF2B5EF4-FFF2-40B4-BE49-F238E27FC236}">
-                <a16:creationId xmlns:a16="http://schemas.microsoft.com/office/drawing/2014/main" id="{A1A14166-BF9C-1BE8-BCF8-BA27BA56A961}"/>
+              <a:t>Host </a:t>
+            </a:r>
+            <a:br>
+              <a:rPr lang="en-US" sz="2400" dirty="0">
+                <a:latin typeface="Times New Roman" panose="02020603050405020304" pitchFamily="18" charset="0"/>
+                <a:cs typeface="Times New Roman" panose="02020603050405020304" pitchFamily="18" charset="0"/>
+              </a:rPr>
+            </a:br>
+            <a:r>
+              <a:rPr lang="en-US" sz="2400" dirty="0">
+                <a:latin typeface="Times New Roman" panose="02020603050405020304" pitchFamily="18" charset="0"/>
+                <a:cs typeface="Times New Roman" panose="02020603050405020304" pitchFamily="18" charset="0"/>
+              </a:rPr>
+              <a:t>123123</a:t>
+            </a:r>
+            <a:endParaRPr lang="ru-RU" sz="2400" dirty="0">
+              <a:latin typeface="Times New Roman" panose="02020603050405020304" pitchFamily="18" charset="0"/>
+              <a:cs typeface="Times New Roman" panose="02020603050405020304" pitchFamily="18" charset="0"/>
+            </a:endParaRPr>
+          </a:p>
+        </p:txBody>
+      </p:sp>
+      <p:sp>
+        <p:nvSpPr>
+          <p:cNvPr id="7" name="Заголовок 1">
+            <a:extLst>
+              <a:ext uri="{FF2B5EF4-FFF2-40B4-BE49-F238E27FC236}">
+                <a16:creationId xmlns:a16="http://schemas.microsoft.com/office/drawing/2014/main" id="{EF0D2A6A-6CEE-3001-0D0C-816A4F95BF5E}"/>
               </a:ext>
             </a:extLst>
           </p:cNvPr>
@@ -4665,7 +5338,7 @@
         </p:nvSpPr>
         <p:spPr>
           <a:xfrm>
-            <a:off x="6721809" y="5978062"/>
+            <a:off x="3601476" y="4568150"/>
             <a:ext cx="4419743" cy="522642"/>
           </a:xfrm>
           <a:prstGeom prst="rect">
@@ -4698,13 +5371,166 @@
           <a:p>
             <a:pPr algn="ctr"/>
             <a:r>
-              <a:rPr lang="en-US" sz="2000" dirty="0">
+              <a:rPr lang="en-US" sz="2400" dirty="0">
                 <a:latin typeface="Times New Roman" panose="02020603050405020304" pitchFamily="18" charset="0"/>
                 <a:cs typeface="Times New Roman" panose="02020603050405020304" pitchFamily="18" charset="0"/>
               </a:rPr>
               <a:t>Github</a:t>
             </a:r>
             <a:endParaRPr lang="ru-RU" sz="3200" dirty="0">
+              <a:latin typeface="Times New Roman" panose="02020603050405020304" pitchFamily="18" charset="0"/>
+              <a:cs typeface="Times New Roman" panose="02020603050405020304" pitchFamily="18" charset="0"/>
+            </a:endParaRPr>
+          </a:p>
+        </p:txBody>
+      </p:sp>
+      <p:sp>
+        <p:nvSpPr>
+          <p:cNvPr id="8" name="Заголовок 1">
+            <a:extLst>
+              <a:ext uri="{FF2B5EF4-FFF2-40B4-BE49-F238E27FC236}">
+                <a16:creationId xmlns:a16="http://schemas.microsoft.com/office/drawing/2014/main" id="{6F99F7B1-2990-7F8A-DEA8-5A221B770248}"/>
+              </a:ext>
+            </a:extLst>
+          </p:cNvPr>
+          <p:cNvSpPr txBox="1">
+            <a:spLocks/>
+          </p:cNvSpPr>
+          <p:nvPr/>
+        </p:nvSpPr>
+        <p:spPr>
+          <a:xfrm>
+            <a:off x="450401" y="4664666"/>
+            <a:ext cx="4150895" cy="331579"/>
+          </a:xfrm>
+          <a:prstGeom prst="rect">
+            <a:avLst/>
+          </a:prstGeom>
+        </p:spPr>
+        <p:txBody>
+          <a:bodyPr vert="horz" lIns="91440" tIns="45720" rIns="91440" bIns="45720" rtlCol="0" anchor="ctr">
+            <a:noAutofit/>
+          </a:bodyPr>
+          <a:lstStyle>
+            <a:lvl1pPr algn="l" defTabSz="914400" rtl="0" eaLnBrk="1" latinLnBrk="0" hangingPunct="1">
+              <a:lnSpc>
+                <a:spcPct val="90000"/>
+              </a:lnSpc>
+              <a:spcBef>
+                <a:spcPct val="0"/>
+              </a:spcBef>
+              <a:buNone/>
+              <a:defRPr sz="4400" kern="1200">
+                <a:solidFill>
+                  <a:schemeClr val="tx1"/>
+                </a:solidFill>
+                <a:latin typeface="+mj-lt"/>
+                <a:ea typeface="+mj-ea"/>
+                <a:cs typeface="+mj-cs"/>
+              </a:defRPr>
+            </a:lvl1pPr>
+          </a:lstStyle>
+          <a:p>
+            <a:r>
+              <a:rPr lang="ru-RU" sz="2400" dirty="0">
+                <a:latin typeface="Times New Roman" panose="02020603050405020304" pitchFamily="18" charset="0"/>
+                <a:cs typeface="Times New Roman" panose="02020603050405020304" pitchFamily="18" charset="0"/>
+              </a:rPr>
+              <a:t>Разработанная система</a:t>
+            </a:r>
+          </a:p>
+        </p:txBody>
+      </p:sp>
+      <p:pic>
+        <p:nvPicPr>
+          <p:cNvPr id="9" name="Рисунок 8" descr="Изображение выглядит как шаблон, прямоугольный, пиксель">
+            <a:extLst>
+              <a:ext uri="{FF2B5EF4-FFF2-40B4-BE49-F238E27FC236}">
+                <a16:creationId xmlns:a16="http://schemas.microsoft.com/office/drawing/2014/main" id="{12202700-8972-49DB-F236-5EBE661B484D}"/>
+              </a:ext>
+            </a:extLst>
+          </p:cNvPr>
+          <p:cNvPicPr>
+            <a:picLocks noChangeAspect="1"/>
+          </p:cNvPicPr>
+          <p:nvPr/>
+        </p:nvPicPr>
+        <p:blipFill>
+          <a:blip r:embed="rId4">
+            <a:extLst>
+              <a:ext uri="{28A0092B-C50C-407E-A947-70E740481C1C}">
+                <a14:useLocalDpi xmlns:a14="http://schemas.microsoft.com/office/drawing/2010/main" val="0"/>
+              </a:ext>
+            </a:extLst>
+          </a:blip>
+          <a:srcRect l="4502" t="4332" r="4349" b="4518"/>
+          <a:stretch/>
+        </p:blipFill>
+        <p:spPr>
+          <a:xfrm>
+            <a:off x="8041294" y="1355929"/>
+            <a:ext cx="3131001" cy="3131001"/>
+          </a:xfrm>
+          <a:prstGeom prst="rect">
+            <a:avLst/>
+          </a:prstGeom>
+        </p:spPr>
+      </p:pic>
+      <p:sp>
+        <p:nvSpPr>
+          <p:cNvPr id="12" name="Заголовок 1">
+            <a:extLst>
+              <a:ext uri="{FF2B5EF4-FFF2-40B4-BE49-F238E27FC236}">
+                <a16:creationId xmlns:a16="http://schemas.microsoft.com/office/drawing/2014/main" id="{DDD9D993-66A1-46FD-3FBC-3A62D58B782D}"/>
+              </a:ext>
+            </a:extLst>
+          </p:cNvPr>
+          <p:cNvSpPr txBox="1">
+            <a:spLocks/>
+          </p:cNvSpPr>
+          <p:nvPr/>
+        </p:nvSpPr>
+        <p:spPr>
+          <a:xfrm>
+            <a:off x="8895552" y="4663680"/>
+            <a:ext cx="4150895" cy="331579"/>
+          </a:xfrm>
+          <a:prstGeom prst="rect">
+            <a:avLst/>
+          </a:prstGeom>
+        </p:spPr>
+        <p:txBody>
+          <a:bodyPr vert="horz" lIns="91440" tIns="45720" rIns="91440" bIns="45720" rtlCol="0" anchor="ctr">
+            <a:noAutofit/>
+          </a:bodyPr>
+          <a:lstStyle>
+            <a:lvl1pPr algn="l" defTabSz="914400" rtl="0" eaLnBrk="1" latinLnBrk="0" hangingPunct="1">
+              <a:lnSpc>
+                <a:spcPct val="90000"/>
+              </a:lnSpc>
+              <a:spcBef>
+                <a:spcPct val="0"/>
+              </a:spcBef>
+              <a:buNone/>
+              <a:defRPr sz="4400" kern="1200">
+                <a:solidFill>
+                  <a:schemeClr val="tx1"/>
+                </a:solidFill>
+                <a:latin typeface="+mj-lt"/>
+                <a:ea typeface="+mj-ea"/>
+                <a:cs typeface="+mj-cs"/>
+              </a:defRPr>
+            </a:lvl1pPr>
+          </a:lstStyle>
+          <a:p>
+            <a:r>
+              <a:rPr lang="ru-RU" sz="2400" dirty="0">
+                <a:latin typeface="Times New Roman" panose="02020603050405020304" pitchFamily="18" charset="0"/>
+                <a:cs typeface="Times New Roman" panose="02020603050405020304" pitchFamily="18" charset="0"/>
+              </a:rPr>
+              <a:t>Пройти тест</a:t>
+            </a:r>
+            <a:endParaRPr lang="ru-RU" sz="2000" dirty="0">
               <a:latin typeface="Times New Roman" panose="02020603050405020304" pitchFamily="18" charset="0"/>
               <a:cs typeface="Times New Roman" panose="02020603050405020304" pitchFamily="18" charset="0"/>
             </a:endParaRPr>
@@ -4741,260 +5567,426 @@
           <a:chExt cx="0" cy="0"/>
         </a:xfrm>
       </p:grpSpPr>
-      <p:sp>
-        <p:nvSpPr>
-          <p:cNvPr id="2" name="Заголовок 1">
-            <a:extLst>
-              <a:ext uri="{FF2B5EF4-FFF2-40B4-BE49-F238E27FC236}">
-                <a16:creationId xmlns:a16="http://schemas.microsoft.com/office/drawing/2014/main" id="{620C646A-788F-4874-840A-A52EEC59321A}"/>
-              </a:ext>
-            </a:extLst>
-          </p:cNvPr>
-          <p:cNvSpPr>
-            <a:spLocks noGrp="1"/>
-          </p:cNvSpPr>
-          <p:nvPr>
-            <p:ph type="title"/>
-          </p:nvPr>
-        </p:nvSpPr>
-        <p:spPr>
-          <a:xfrm>
-            <a:off x="838200" y="365126"/>
+      <p:pic>
+        <p:nvPicPr>
+          <p:cNvPr id="2" name="Рисунок 1" descr="Изображение выглядит как шаблон, прямоугольный, пиксель, дизайн&#10;&#10;Контент, сгенерированный ИИ, может содержать ошибки.">
+            <a:extLst>
+              <a:ext uri="{FF2B5EF4-FFF2-40B4-BE49-F238E27FC236}">
+                <a16:creationId xmlns:a16="http://schemas.microsoft.com/office/drawing/2014/main" id="{9D6EB515-A2DA-00D1-67DB-4D291D3C9D20}"/>
+              </a:ext>
+            </a:extLst>
+          </p:cNvPr>
+          <p:cNvPicPr>
+            <a:picLocks noChangeAspect="1"/>
+          </p:cNvPicPr>
+          <p:nvPr/>
+        </p:nvPicPr>
+        <p:blipFill>
+          <a:blip r:embed="rId2">
+            <a:extLst>
+              <a:ext uri="{28A0092B-C50C-407E-A947-70E740481C1C}">
+                <a14:useLocalDpi xmlns:a14="http://schemas.microsoft.com/office/drawing/2010/main" val="0"/>
+              </a:ext>
+            </a:extLst>
+          </a:blip>
+          <a:srcRect l="4520" t="4549" r="4449" b="4549"/>
+          <a:stretch/>
+        </p:blipFill>
+        <p:spPr>
+          <a:xfrm>
+            <a:off x="4530500" y="1865736"/>
+            <a:ext cx="3131000" cy="3126527"/>
+          </a:xfrm>
+          <a:prstGeom prst="rect">
+            <a:avLst/>
+          </a:prstGeom>
+        </p:spPr>
+      </p:pic>
+      <p:pic>
+        <p:nvPicPr>
+          <p:cNvPr id="3" name="Рисунок 2" descr="Изображение выглядит как шаблон, прямоугольный, Симметрия, Графика&#10;&#10;Контент, сгенерированный ИИ, может содержать ошибки.">
+            <a:extLst>
+              <a:ext uri="{FF2B5EF4-FFF2-40B4-BE49-F238E27FC236}">
+                <a16:creationId xmlns:a16="http://schemas.microsoft.com/office/drawing/2014/main" id="{B291F1C5-2D40-5F12-DCD9-A8234DF54276}"/>
+              </a:ext>
+            </a:extLst>
+          </p:cNvPr>
+          <p:cNvPicPr>
+            <a:picLocks noChangeAspect="1"/>
+          </p:cNvPicPr>
+          <p:nvPr/>
+        </p:nvPicPr>
+        <p:blipFill>
+          <a:blip r:embed="rId3">
+            <a:extLst>
+              <a:ext uri="{28A0092B-C50C-407E-A947-70E740481C1C}">
+                <a14:useLocalDpi xmlns:a14="http://schemas.microsoft.com/office/drawing/2010/main" val="0"/>
+              </a:ext>
+            </a:extLst>
+          </a:blip>
+          <a:srcRect l="6236" t="6396" r="6182" b="6147"/>
+          <a:stretch/>
+        </p:blipFill>
+        <p:spPr>
+          <a:xfrm>
+            <a:off x="735053" y="1865736"/>
+            <a:ext cx="3131000" cy="3126527"/>
+          </a:xfrm>
+          <a:prstGeom prst="rect">
+            <a:avLst/>
+          </a:prstGeom>
+        </p:spPr>
+      </p:pic>
+      <p:sp>
+        <p:nvSpPr>
+          <p:cNvPr id="9" name="Заголовок 1">
+            <a:extLst>
+              <a:ext uri="{FF2B5EF4-FFF2-40B4-BE49-F238E27FC236}">
+                <a16:creationId xmlns:a16="http://schemas.microsoft.com/office/drawing/2014/main" id="{0BCB7199-CFED-AC95-F32B-AC69333E0794}"/>
+              </a:ext>
+            </a:extLst>
+          </p:cNvPr>
+          <p:cNvSpPr txBox="1">
+            <a:spLocks/>
+          </p:cNvSpPr>
+          <p:nvPr/>
+        </p:nvSpPr>
+        <p:spPr>
+          <a:xfrm>
+            <a:off x="806693" y="5505067"/>
+            <a:ext cx="4150895" cy="1181703"/>
+          </a:xfrm>
+          <a:prstGeom prst="rect">
+            <a:avLst/>
+          </a:prstGeom>
+        </p:spPr>
+        <p:txBody>
+          <a:bodyPr vert="horz" lIns="91440" tIns="45720" rIns="91440" bIns="45720" rtlCol="0" anchor="ctr">
+            <a:noAutofit/>
+          </a:bodyPr>
+          <a:lstStyle>
+            <a:lvl1pPr algn="l" defTabSz="914400" rtl="0" eaLnBrk="1" latinLnBrk="0" hangingPunct="1">
+              <a:lnSpc>
+                <a:spcPct val="90000"/>
+              </a:lnSpc>
+              <a:spcBef>
+                <a:spcPct val="0"/>
+              </a:spcBef>
+              <a:buNone/>
+              <a:defRPr sz="4400" kern="1200">
+                <a:solidFill>
+                  <a:schemeClr val="tx1"/>
+                </a:solidFill>
+                <a:latin typeface="+mj-lt"/>
+                <a:ea typeface="+mj-ea"/>
+                <a:cs typeface="+mj-cs"/>
+              </a:defRPr>
+            </a:lvl1pPr>
+          </a:lstStyle>
+          <a:p>
+            <a:r>
+              <a:rPr lang="en-US" sz="2400" dirty="0">
+                <a:latin typeface="Times New Roman" panose="02020603050405020304" pitchFamily="18" charset="0"/>
+                <a:cs typeface="Times New Roman" panose="02020603050405020304" pitchFamily="18" charset="0"/>
+              </a:rPr>
+              <a:t>Host </a:t>
+            </a:r>
+            <a:br>
+              <a:rPr lang="en-US" sz="2400" dirty="0">
+                <a:latin typeface="Times New Roman" panose="02020603050405020304" pitchFamily="18" charset="0"/>
+                <a:cs typeface="Times New Roman" panose="02020603050405020304" pitchFamily="18" charset="0"/>
+              </a:rPr>
+            </a:br>
+            <a:r>
+              <a:rPr lang="en-US" sz="2400" dirty="0">
+                <a:latin typeface="Times New Roman" panose="02020603050405020304" pitchFamily="18" charset="0"/>
+                <a:cs typeface="Times New Roman" panose="02020603050405020304" pitchFamily="18" charset="0"/>
+              </a:rPr>
+              <a:t>123123</a:t>
+            </a:r>
+            <a:endParaRPr lang="ru-RU" sz="2400" dirty="0">
+              <a:latin typeface="Times New Roman" panose="02020603050405020304" pitchFamily="18" charset="0"/>
+              <a:cs typeface="Times New Roman" panose="02020603050405020304" pitchFamily="18" charset="0"/>
+            </a:endParaRPr>
+          </a:p>
+        </p:txBody>
+      </p:sp>
+      <p:sp>
+        <p:nvSpPr>
+          <p:cNvPr id="10" name="Заголовок 1">
+            <a:extLst>
+              <a:ext uri="{FF2B5EF4-FFF2-40B4-BE49-F238E27FC236}">
+                <a16:creationId xmlns:a16="http://schemas.microsoft.com/office/drawing/2014/main" id="{2C2A8606-18BC-D4E5-3B35-9A81F283BEE3}"/>
+              </a:ext>
+            </a:extLst>
+          </p:cNvPr>
+          <p:cNvSpPr txBox="1">
+            <a:spLocks/>
+          </p:cNvSpPr>
+          <p:nvPr/>
+        </p:nvSpPr>
+        <p:spPr>
+          <a:xfrm>
+            <a:off x="3886128" y="5077957"/>
+            <a:ext cx="4419743" cy="522642"/>
+          </a:xfrm>
+          <a:prstGeom prst="rect">
+            <a:avLst/>
+          </a:prstGeom>
+        </p:spPr>
+        <p:txBody>
+          <a:bodyPr vert="horz" lIns="91440" tIns="45720" rIns="91440" bIns="45720" rtlCol="0" anchor="ctr">
+            <a:noAutofit/>
+          </a:bodyPr>
+          <a:lstStyle>
+            <a:lvl1pPr algn="l" defTabSz="914400" rtl="0" eaLnBrk="1" latinLnBrk="0" hangingPunct="1">
+              <a:lnSpc>
+                <a:spcPct val="90000"/>
+              </a:lnSpc>
+              <a:spcBef>
+                <a:spcPct val="0"/>
+              </a:spcBef>
+              <a:buNone/>
+              <a:defRPr sz="4400" kern="1200">
+                <a:solidFill>
+                  <a:schemeClr val="tx1"/>
+                </a:solidFill>
+                <a:latin typeface="+mj-lt"/>
+                <a:ea typeface="+mj-ea"/>
+                <a:cs typeface="+mj-cs"/>
+              </a:defRPr>
+            </a:lvl1pPr>
+          </a:lstStyle>
+          <a:p>
+            <a:pPr algn="ctr"/>
+            <a:r>
+              <a:rPr lang="en-US" sz="2400" dirty="0">
+                <a:latin typeface="Times New Roman" panose="02020603050405020304" pitchFamily="18" charset="0"/>
+                <a:cs typeface="Times New Roman" panose="02020603050405020304" pitchFamily="18" charset="0"/>
+              </a:rPr>
+              <a:t>Github</a:t>
+            </a:r>
+            <a:endParaRPr lang="ru-RU" sz="3200" dirty="0">
+              <a:latin typeface="Times New Roman" panose="02020603050405020304" pitchFamily="18" charset="0"/>
+              <a:cs typeface="Times New Roman" panose="02020603050405020304" pitchFamily="18" charset="0"/>
+            </a:endParaRPr>
+          </a:p>
+        </p:txBody>
+      </p:sp>
+      <p:sp>
+        <p:nvSpPr>
+          <p:cNvPr id="11" name="Заголовок 1">
+            <a:extLst>
+              <a:ext uri="{FF2B5EF4-FFF2-40B4-BE49-F238E27FC236}">
+                <a16:creationId xmlns:a16="http://schemas.microsoft.com/office/drawing/2014/main" id="{90E9C983-F978-1A0B-69A9-DBE1F08C46FC}"/>
+              </a:ext>
+            </a:extLst>
+          </p:cNvPr>
+          <p:cNvSpPr txBox="1">
+            <a:spLocks/>
+          </p:cNvSpPr>
+          <p:nvPr/>
+        </p:nvSpPr>
+        <p:spPr>
+          <a:xfrm>
+            <a:off x="735053" y="5174473"/>
+            <a:ext cx="4150895" cy="331579"/>
+          </a:xfrm>
+          <a:prstGeom prst="rect">
+            <a:avLst/>
+          </a:prstGeom>
+        </p:spPr>
+        <p:txBody>
+          <a:bodyPr vert="horz" lIns="91440" tIns="45720" rIns="91440" bIns="45720" rtlCol="0" anchor="ctr">
+            <a:noAutofit/>
+          </a:bodyPr>
+          <a:lstStyle>
+            <a:lvl1pPr algn="l" defTabSz="914400" rtl="0" eaLnBrk="1" latinLnBrk="0" hangingPunct="1">
+              <a:lnSpc>
+                <a:spcPct val="90000"/>
+              </a:lnSpc>
+              <a:spcBef>
+                <a:spcPct val="0"/>
+              </a:spcBef>
+              <a:buNone/>
+              <a:defRPr sz="4400" kern="1200">
+                <a:solidFill>
+                  <a:schemeClr val="tx1"/>
+                </a:solidFill>
+                <a:latin typeface="+mj-lt"/>
+                <a:ea typeface="+mj-ea"/>
+                <a:cs typeface="+mj-cs"/>
+              </a:defRPr>
+            </a:lvl1pPr>
+          </a:lstStyle>
+          <a:p>
+            <a:r>
+              <a:rPr lang="ru-RU" sz="2400" dirty="0">
+                <a:latin typeface="Times New Roman" panose="02020603050405020304" pitchFamily="18" charset="0"/>
+                <a:cs typeface="Times New Roman" panose="02020603050405020304" pitchFamily="18" charset="0"/>
+              </a:rPr>
+              <a:t>Разработанная система</a:t>
+            </a:r>
+          </a:p>
+        </p:txBody>
+      </p:sp>
+      <p:pic>
+        <p:nvPicPr>
+          <p:cNvPr id="13" name="Рисунок 12" descr="Изображение выглядит как шаблон, прямоугольный, пиксель">
+            <a:extLst>
+              <a:ext uri="{FF2B5EF4-FFF2-40B4-BE49-F238E27FC236}">
+                <a16:creationId xmlns:a16="http://schemas.microsoft.com/office/drawing/2014/main" id="{5542E2C7-59AD-0975-3775-C7AB3E662D82}"/>
+              </a:ext>
+            </a:extLst>
+          </p:cNvPr>
+          <p:cNvPicPr>
+            <a:picLocks noChangeAspect="1"/>
+          </p:cNvPicPr>
+          <p:nvPr/>
+        </p:nvPicPr>
+        <p:blipFill>
+          <a:blip r:embed="rId4">
+            <a:extLst>
+              <a:ext uri="{28A0092B-C50C-407E-A947-70E740481C1C}">
+                <a14:useLocalDpi xmlns:a14="http://schemas.microsoft.com/office/drawing/2010/main" val="0"/>
+              </a:ext>
+            </a:extLst>
+          </a:blip>
+          <a:srcRect l="4502" t="4332" r="4349" b="4518"/>
+          <a:stretch/>
+        </p:blipFill>
+        <p:spPr>
+          <a:xfrm>
+            <a:off x="8325946" y="1865736"/>
+            <a:ext cx="3131001" cy="3131001"/>
+          </a:xfrm>
+          <a:prstGeom prst="rect">
+            <a:avLst/>
+          </a:prstGeom>
+        </p:spPr>
+      </p:pic>
+      <p:sp>
+        <p:nvSpPr>
+          <p:cNvPr id="14" name="Заголовок 1">
+            <a:extLst>
+              <a:ext uri="{FF2B5EF4-FFF2-40B4-BE49-F238E27FC236}">
+                <a16:creationId xmlns:a16="http://schemas.microsoft.com/office/drawing/2014/main" id="{11C47D42-3567-9966-BC15-B4F98A92C392}"/>
+              </a:ext>
+            </a:extLst>
+          </p:cNvPr>
+          <p:cNvSpPr txBox="1">
+            <a:spLocks/>
+          </p:cNvSpPr>
+          <p:nvPr/>
+        </p:nvSpPr>
+        <p:spPr>
+          <a:xfrm>
+            <a:off x="9180204" y="5173487"/>
+            <a:ext cx="4150895" cy="331579"/>
+          </a:xfrm>
+          <a:prstGeom prst="rect">
+            <a:avLst/>
+          </a:prstGeom>
+        </p:spPr>
+        <p:txBody>
+          <a:bodyPr vert="horz" lIns="91440" tIns="45720" rIns="91440" bIns="45720" rtlCol="0" anchor="ctr">
+            <a:noAutofit/>
+          </a:bodyPr>
+          <a:lstStyle>
+            <a:lvl1pPr algn="l" defTabSz="914400" rtl="0" eaLnBrk="1" latinLnBrk="0" hangingPunct="1">
+              <a:lnSpc>
+                <a:spcPct val="90000"/>
+              </a:lnSpc>
+              <a:spcBef>
+                <a:spcPct val="0"/>
+              </a:spcBef>
+              <a:buNone/>
+              <a:defRPr sz="4400" kern="1200">
+                <a:solidFill>
+                  <a:schemeClr val="tx1"/>
+                </a:solidFill>
+                <a:latin typeface="+mj-lt"/>
+                <a:ea typeface="+mj-ea"/>
+                <a:cs typeface="+mj-cs"/>
+              </a:defRPr>
+            </a:lvl1pPr>
+          </a:lstStyle>
+          <a:p>
+            <a:r>
+              <a:rPr lang="ru-RU" sz="2400" dirty="0">
+                <a:latin typeface="Times New Roman" panose="02020603050405020304" pitchFamily="18" charset="0"/>
+                <a:cs typeface="Times New Roman" panose="02020603050405020304" pitchFamily="18" charset="0"/>
+              </a:rPr>
+              <a:t>Пройти тест</a:t>
+            </a:r>
+            <a:endParaRPr lang="ru-RU" sz="2000" dirty="0">
+              <a:latin typeface="Times New Roman" panose="02020603050405020304" pitchFamily="18" charset="0"/>
+              <a:cs typeface="Times New Roman" panose="02020603050405020304" pitchFamily="18" charset="0"/>
+            </a:endParaRPr>
+          </a:p>
+        </p:txBody>
+      </p:sp>
+      <p:sp>
+        <p:nvSpPr>
+          <p:cNvPr id="15" name="Заголовок 1">
+            <a:extLst>
+              <a:ext uri="{FF2B5EF4-FFF2-40B4-BE49-F238E27FC236}">
+                <a16:creationId xmlns:a16="http://schemas.microsoft.com/office/drawing/2014/main" id="{AFE5662C-4E3B-C379-C239-73BAE2E0CA94}"/>
+              </a:ext>
+            </a:extLst>
+          </p:cNvPr>
+          <p:cNvSpPr txBox="1">
+            <a:spLocks/>
+          </p:cNvSpPr>
+          <p:nvPr/>
+        </p:nvSpPr>
+        <p:spPr>
+          <a:xfrm>
+            <a:off x="838199" y="518244"/>
             <a:ext cx="10515600" cy="522642"/>
           </a:xfrm>
-        </p:spPr>
-        <p:txBody>
-          <a:bodyPr>
-            <a:normAutofit fontScale="90000"/>
+          <a:prstGeom prst="rect">
+            <a:avLst/>
+          </a:prstGeom>
+        </p:spPr>
+        <p:txBody>
+          <a:bodyPr vert="horz" lIns="91440" tIns="45720" rIns="91440" bIns="45720" rtlCol="0" anchor="b">
+            <a:normAutofit fontScale="90000" lnSpcReduction="20000"/>
           </a:bodyPr>
-          <a:lstStyle/>
-          <a:p>
-            <a:pPr algn="ctr"/>
+          <a:lstStyle>
+            <a:lvl1pPr algn="ctr" defTabSz="914400" rtl="0" eaLnBrk="1" latinLnBrk="0" hangingPunct="1">
+              <a:lnSpc>
+                <a:spcPct val="90000"/>
+              </a:lnSpc>
+              <a:spcBef>
+                <a:spcPct val="0"/>
+              </a:spcBef>
+              <a:buNone/>
+              <a:defRPr sz="6000" kern="1200">
+                <a:solidFill>
+                  <a:schemeClr val="tx1"/>
+                </a:solidFill>
+                <a:latin typeface="+mj-lt"/>
+                <a:ea typeface="+mj-ea"/>
+                <a:cs typeface="+mj-cs"/>
+              </a:defRPr>
+            </a:lvl1pPr>
+          </a:lstStyle>
+          <a:p>
             <a:r>
               <a:rPr lang="ru-RU" sz="4000" dirty="0">
                 <a:latin typeface="Times New Roman" panose="02020603050405020304" pitchFamily="18" charset="0"/>
                 <a:cs typeface="Times New Roman" panose="02020603050405020304" pitchFamily="18" charset="0"/>
               </a:rPr>
-              <a:t>Цель и задачи</a:t>
-            </a:r>
-          </a:p>
-        </p:txBody>
-      </p:sp>
-      <p:sp>
-        <p:nvSpPr>
-          <p:cNvPr id="3" name="Объект 2">
-            <a:extLst>
-              <a:ext uri="{FF2B5EF4-FFF2-40B4-BE49-F238E27FC236}">
-                <a16:creationId xmlns:a16="http://schemas.microsoft.com/office/drawing/2014/main" id="{9D9CCF5B-391A-441A-A96A-78AD5DA5B4EF}"/>
-              </a:ext>
-            </a:extLst>
-          </p:cNvPr>
-          <p:cNvSpPr>
-            <a:spLocks noGrp="1"/>
-          </p:cNvSpPr>
-          <p:nvPr>
-            <p:ph idx="1"/>
-          </p:nvPr>
-        </p:nvSpPr>
-        <p:spPr>
-          <a:xfrm>
-            <a:off x="838200" y="1118586"/>
-            <a:ext cx="10600944" cy="5058377"/>
-          </a:xfrm>
-        </p:spPr>
-        <p:txBody>
-          <a:bodyPr>
-            <a:noAutofit/>
-          </a:bodyPr>
-          <a:lstStyle/>
-          <a:p>
-            <a:pPr marL="0" indent="0">
-              <a:lnSpc>
-                <a:spcPct val="100000"/>
-              </a:lnSpc>
-              <a:spcAft>
-                <a:spcPts val="800"/>
-              </a:spcAft>
-              <a:buNone/>
-            </a:pPr>
-            <a:r>
-              <a:rPr lang="ru-RU" sz="2000" kern="100" dirty="0">
-                <a:effectLst/>
-                <a:latin typeface="Times New Roman" panose="02020603050405020304" pitchFamily="18" charset="0"/>
-                <a:ea typeface="Aptos" panose="020B0004020202020204" pitchFamily="34" charset="0"/>
-                <a:cs typeface="Times New Roman" panose="02020603050405020304" pitchFamily="18" charset="0"/>
-              </a:rPr>
-              <a:t>Цель работы – спроектировать и разработать распределённую экспертную систему тестирования знаний по дискретной математике, построенную на микросервисной архитектуре и обеспечивающую масштабируемость, отказоустойчивость и гибкое управление правилами оценки.</a:t>
-            </a:r>
-          </a:p>
-          <a:p>
-            <a:pPr marL="0" indent="0">
-              <a:lnSpc>
-                <a:spcPct val="100000"/>
-              </a:lnSpc>
-              <a:spcAft>
-                <a:spcPts val="800"/>
-              </a:spcAft>
-              <a:buNone/>
-            </a:pPr>
-            <a:r>
-              <a:rPr lang="ru-RU" sz="2000" kern="100" dirty="0">
-                <a:effectLst/>
-                <a:latin typeface="Times New Roman" panose="02020603050405020304" pitchFamily="18" charset="0"/>
-                <a:ea typeface="Aptos" panose="020B0004020202020204" pitchFamily="34" charset="0"/>
-                <a:cs typeface="Times New Roman" panose="02020603050405020304" pitchFamily="18" charset="0"/>
-              </a:rPr>
-              <a:t>Для достижения поставленной цели были определены следующие задачи:</a:t>
-            </a:r>
-          </a:p>
-          <a:p>
-            <a:pPr marL="342900" lvl="0" indent="-342900">
-              <a:lnSpc>
-                <a:spcPct val="100000"/>
-              </a:lnSpc>
-              <a:buFont typeface="+mj-lt"/>
-              <a:buAutoNum type="arabicPeriod"/>
-            </a:pPr>
-            <a:r>
-              <a:rPr lang="ru-RU" sz="2000" kern="100" dirty="0">
-                <a:latin typeface="Times New Roman" panose="02020603050405020304" pitchFamily="18" charset="0"/>
-                <a:ea typeface="Aptos" panose="020B0004020202020204" pitchFamily="34" charset="0"/>
-                <a:cs typeface="Times New Roman" panose="02020603050405020304" pitchFamily="18" charset="0"/>
-              </a:rPr>
-              <a:t>П</a:t>
-            </a:r>
-            <a:r>
-              <a:rPr lang="ru-RU" sz="2000" kern="100" dirty="0">
-                <a:effectLst/>
-                <a:latin typeface="Times New Roman" panose="02020603050405020304" pitchFamily="18" charset="0"/>
-                <a:ea typeface="Aptos" panose="020B0004020202020204" pitchFamily="34" charset="0"/>
-                <a:cs typeface="Times New Roman" panose="02020603050405020304" pitchFamily="18" charset="0"/>
-              </a:rPr>
-              <a:t>роанализировать существующие системы тестирования, выявить их ограничения и сформулировать требования к разрабатываемому комплексу, включая требования к пользовательским интерфейсам.</a:t>
-            </a:r>
-          </a:p>
-          <a:p>
-            <a:pPr marL="342900" lvl="0" indent="-342900">
-              <a:lnSpc>
-                <a:spcPct val="100000"/>
-              </a:lnSpc>
-              <a:buFont typeface="+mj-lt"/>
-              <a:buAutoNum type="arabicPeriod"/>
-            </a:pPr>
-            <a:r>
-              <a:rPr lang="ru-RU" sz="2000" kern="100" dirty="0">
-                <a:latin typeface="Times New Roman" panose="02020603050405020304" pitchFamily="18" charset="0"/>
-                <a:ea typeface="Aptos" panose="020B0004020202020204" pitchFamily="34" charset="0"/>
-                <a:cs typeface="Times New Roman" panose="02020603050405020304" pitchFamily="18" charset="0"/>
-              </a:rPr>
-              <a:t>Р</a:t>
-            </a:r>
-            <a:r>
-              <a:rPr lang="ru-RU" sz="2000" kern="100" dirty="0">
-                <a:effectLst/>
-                <a:latin typeface="Times New Roman" panose="02020603050405020304" pitchFamily="18" charset="0"/>
-                <a:ea typeface="Aptos" panose="020B0004020202020204" pitchFamily="34" charset="0"/>
-                <a:cs typeface="Times New Roman" panose="02020603050405020304" pitchFamily="18" charset="0"/>
-              </a:rPr>
-              <a:t>азработать модель критериев поэлементной оценки знаний и спроектировать микросервисную архитектуру системы с экспертной подсистемой.</a:t>
-            </a:r>
-          </a:p>
-          <a:p>
-            <a:pPr marL="342900" lvl="0" indent="-342900">
-              <a:lnSpc>
-                <a:spcPct val="100000"/>
-              </a:lnSpc>
-              <a:buFont typeface="+mj-lt"/>
-              <a:buAutoNum type="arabicPeriod"/>
-            </a:pPr>
-            <a:r>
-              <a:rPr lang="ru-RU" sz="2000" kern="100" dirty="0">
-                <a:latin typeface="Times New Roman" panose="02020603050405020304" pitchFamily="18" charset="0"/>
-                <a:ea typeface="Aptos" panose="020B0004020202020204" pitchFamily="34" charset="0"/>
-                <a:cs typeface="Times New Roman" panose="02020603050405020304" pitchFamily="18" charset="0"/>
-              </a:rPr>
-              <a:t>Р</a:t>
-            </a:r>
-            <a:r>
-              <a:rPr lang="ru-RU" sz="2000" kern="100" dirty="0">
-                <a:effectLst/>
-                <a:latin typeface="Times New Roman" panose="02020603050405020304" pitchFamily="18" charset="0"/>
-                <a:ea typeface="Aptos" panose="020B0004020202020204" pitchFamily="34" charset="0"/>
-                <a:cs typeface="Times New Roman" panose="02020603050405020304" pitchFamily="18" charset="0"/>
-              </a:rPr>
-              <a:t>еализовать веб-клиент и десктопное приложение тестирования, а также сервис сессий с механизмом логического вывода.</a:t>
-            </a:r>
-          </a:p>
-          <a:p>
-            <a:pPr marL="342900" lvl="0" indent="-342900">
-              <a:lnSpc>
-                <a:spcPct val="100000"/>
-              </a:lnSpc>
-              <a:spcAft>
-                <a:spcPts val="800"/>
-              </a:spcAft>
-              <a:buFont typeface="+mj-lt"/>
-              <a:buAutoNum type="arabicPeriod"/>
-            </a:pPr>
-            <a:r>
-              <a:rPr lang="ru-RU" sz="2000" kern="100" dirty="0">
-                <a:latin typeface="Times New Roman" panose="02020603050405020304" pitchFamily="18" charset="0"/>
-                <a:ea typeface="Aptos" panose="020B0004020202020204" pitchFamily="34" charset="0"/>
-                <a:cs typeface="Times New Roman" panose="02020603050405020304" pitchFamily="18" charset="0"/>
-              </a:rPr>
-              <a:t>П</a:t>
-            </a:r>
-            <a:r>
-              <a:rPr lang="ru-RU" sz="2000" kern="100" dirty="0">
-                <a:effectLst/>
-                <a:latin typeface="Times New Roman" panose="02020603050405020304" pitchFamily="18" charset="0"/>
-                <a:ea typeface="Aptos" panose="020B0004020202020204" pitchFamily="34" charset="0"/>
-                <a:cs typeface="Times New Roman" panose="02020603050405020304" pitchFamily="18" charset="0"/>
-              </a:rPr>
-              <a:t>ровести тестирование прототипа для проверки корректности экспертной оценки и работоспособности пользовательских интерфейсов.</a:t>
-            </a:r>
-          </a:p>
-        </p:txBody>
-      </p:sp>
-      <p:sp>
-        <p:nvSpPr>
-          <p:cNvPr id="4" name="Номер слайда 3">
-            <a:extLst>
-              <a:ext uri="{FF2B5EF4-FFF2-40B4-BE49-F238E27FC236}">
-                <a16:creationId xmlns:a16="http://schemas.microsoft.com/office/drawing/2014/main" id="{36742D18-EF0F-2CCA-3B72-38030B27FBCC}"/>
-              </a:ext>
-            </a:extLst>
-          </p:cNvPr>
-          <p:cNvSpPr>
-            <a:spLocks noGrp="1"/>
-          </p:cNvSpPr>
-          <p:nvPr>
-            <p:ph type="sldNum" sz="quarter" idx="12"/>
-          </p:nvPr>
-        </p:nvSpPr>
-        <p:spPr>
-          <a:xfrm>
-            <a:off x="8610600" y="6176963"/>
-            <a:ext cx="2743200" cy="365125"/>
-          </a:xfrm>
-        </p:spPr>
-        <p:txBody>
-          <a:bodyPr/>
-          <a:lstStyle/>
-          <a:p>
-            <a:fld id="{40CEF85B-4928-4330-BA98-C984623441A6}" type="slidenum">
-              <a:rPr lang="ru-RU" sz="4400" smtClean="0"/>
-              <a:pPr/>
-              <a:t>2</a:t>
-            </a:fld>
-            <a:endParaRPr lang="ru-RU" sz="4400" dirty="0"/>
+              <a:t>Ссылки</a:t>
+            </a:r>
           </a:p>
         </p:txBody>
       </p:sp>
     </p:spTree>
     <p:extLst>
       <p:ext uri="{BB962C8B-B14F-4D97-AF65-F5344CB8AC3E}">
-        <p14:creationId xmlns:p14="http://schemas.microsoft.com/office/powerpoint/2010/main" val="2672466092"/>
+        <p14:creationId xmlns:p14="http://schemas.microsoft.com/office/powerpoint/2010/main" val="2385425362"/>
       </p:ext>
     </p:extLst>
   </p:cSld>
@@ -5055,7 +6047,183 @@
                 <a:latin typeface="Times New Roman" panose="02020603050405020304" pitchFamily="18" charset="0"/>
                 <a:cs typeface="Times New Roman" panose="02020603050405020304" pitchFamily="18" charset="0"/>
               </a:rPr>
-              <a:t>Анализ аналогов</a:t>
+              <a:t>Цель и задачи</a:t>
+            </a:r>
+          </a:p>
+        </p:txBody>
+      </p:sp>
+      <p:sp>
+        <p:nvSpPr>
+          <p:cNvPr id="3" name="Объект 2">
+            <a:extLst>
+              <a:ext uri="{FF2B5EF4-FFF2-40B4-BE49-F238E27FC236}">
+                <a16:creationId xmlns:a16="http://schemas.microsoft.com/office/drawing/2014/main" id="{9D9CCF5B-391A-441A-A96A-78AD5DA5B4EF}"/>
+              </a:ext>
+            </a:extLst>
+          </p:cNvPr>
+          <p:cNvSpPr>
+            <a:spLocks noGrp="1"/>
+          </p:cNvSpPr>
+          <p:nvPr>
+            <p:ph idx="1"/>
+          </p:nvPr>
+        </p:nvSpPr>
+        <p:spPr>
+          <a:xfrm>
+            <a:off x="838200" y="1118586"/>
+            <a:ext cx="10600944" cy="5058377"/>
+          </a:xfrm>
+        </p:spPr>
+        <p:txBody>
+          <a:bodyPr>
+            <a:noAutofit/>
+          </a:bodyPr>
+          <a:lstStyle/>
+          <a:p>
+            <a:pPr marL="0" indent="0">
+              <a:lnSpc>
+                <a:spcPct val="100000"/>
+              </a:lnSpc>
+              <a:spcAft>
+                <a:spcPts val="800"/>
+              </a:spcAft>
+              <a:buNone/>
+            </a:pPr>
+            <a:r>
+              <a:rPr lang="ru-RU" sz="2000" kern="100" dirty="0">
+                <a:effectLst/>
+                <a:latin typeface="Times New Roman" panose="02020603050405020304" pitchFamily="18" charset="0"/>
+                <a:ea typeface="Aptos" panose="020B0004020202020204" pitchFamily="34" charset="0"/>
+                <a:cs typeface="Times New Roman" panose="02020603050405020304" pitchFamily="18" charset="0"/>
+              </a:rPr>
+              <a:t>Цель работы – спроектировать и разработать распределённую экспертную систему тестирования знаний по дискретной математике, построенную на микросервисной архитектуре и обеспечивающую масштабируемость, отказоустойчивость и гибкое управление правилами оценки.</a:t>
+            </a:r>
+          </a:p>
+          <a:p>
+            <a:pPr marL="0" indent="0">
+              <a:lnSpc>
+                <a:spcPct val="100000"/>
+              </a:lnSpc>
+              <a:spcAft>
+                <a:spcPts val="800"/>
+              </a:spcAft>
+              <a:buNone/>
+            </a:pPr>
+            <a:r>
+              <a:rPr lang="ru-RU" sz="2000" kern="100" dirty="0">
+                <a:effectLst/>
+                <a:latin typeface="Times New Roman" panose="02020603050405020304" pitchFamily="18" charset="0"/>
+                <a:ea typeface="Aptos" panose="020B0004020202020204" pitchFamily="34" charset="0"/>
+                <a:cs typeface="Times New Roman" panose="02020603050405020304" pitchFamily="18" charset="0"/>
+              </a:rPr>
+              <a:t>Для достижения поставленной цели были определены следующие задачи:</a:t>
+            </a:r>
+          </a:p>
+          <a:p>
+            <a:pPr marL="342900" lvl="0" indent="-342900">
+              <a:lnSpc>
+                <a:spcPct val="100000"/>
+              </a:lnSpc>
+              <a:buFont typeface="+mj-lt"/>
+              <a:buAutoNum type="arabicPeriod"/>
+            </a:pPr>
+            <a:r>
+              <a:rPr lang="ru-RU" sz="2000" kern="100" dirty="0">
+                <a:latin typeface="Times New Roman" panose="02020603050405020304" pitchFamily="18" charset="0"/>
+                <a:ea typeface="Aptos" panose="020B0004020202020204" pitchFamily="34" charset="0"/>
+                <a:cs typeface="Times New Roman" panose="02020603050405020304" pitchFamily="18" charset="0"/>
+              </a:rPr>
+              <a:t>П</a:t>
+            </a:r>
+            <a:r>
+              <a:rPr lang="ru-RU" sz="2000" kern="100" dirty="0">
+                <a:effectLst/>
+                <a:latin typeface="Times New Roman" panose="02020603050405020304" pitchFamily="18" charset="0"/>
+                <a:ea typeface="Aptos" panose="020B0004020202020204" pitchFamily="34" charset="0"/>
+                <a:cs typeface="Times New Roman" panose="02020603050405020304" pitchFamily="18" charset="0"/>
+              </a:rPr>
+              <a:t>роанализировать существующие системы тестирования, выявить их ограничения и сформулировать требования к разрабатываемому комплексу, включая требования к пользовательским интерфейсам.</a:t>
+            </a:r>
+          </a:p>
+          <a:p>
+            <a:pPr marL="342900" lvl="0" indent="-342900">
+              <a:lnSpc>
+                <a:spcPct val="100000"/>
+              </a:lnSpc>
+              <a:buFont typeface="+mj-lt"/>
+              <a:buAutoNum type="arabicPeriod"/>
+            </a:pPr>
+            <a:r>
+              <a:rPr lang="ru-RU" sz="2000" kern="100" dirty="0">
+                <a:latin typeface="Times New Roman" panose="02020603050405020304" pitchFamily="18" charset="0"/>
+                <a:ea typeface="Aptos" panose="020B0004020202020204" pitchFamily="34" charset="0"/>
+                <a:cs typeface="Times New Roman" panose="02020603050405020304" pitchFamily="18" charset="0"/>
+              </a:rPr>
+              <a:t>Р</a:t>
+            </a:r>
+            <a:r>
+              <a:rPr lang="ru-RU" sz="2000" kern="100" dirty="0">
+                <a:effectLst/>
+                <a:latin typeface="Times New Roman" panose="02020603050405020304" pitchFamily="18" charset="0"/>
+                <a:ea typeface="Aptos" panose="020B0004020202020204" pitchFamily="34" charset="0"/>
+                <a:cs typeface="Times New Roman" panose="02020603050405020304" pitchFamily="18" charset="0"/>
+              </a:rPr>
+              <a:t>азработать модель критериев оценки знаний и спроектировать микросервисную архитектуру системы с экспертной подсистемой.</a:t>
+            </a:r>
+          </a:p>
+          <a:p>
+            <a:pPr marL="342900" lvl="0" indent="-342900">
+              <a:lnSpc>
+                <a:spcPct val="100000"/>
+              </a:lnSpc>
+              <a:buFont typeface="+mj-lt"/>
+              <a:buAutoNum type="arabicPeriod"/>
+            </a:pPr>
+            <a:r>
+              <a:rPr lang="ru-RU" sz="2000" kern="100" dirty="0">
+                <a:latin typeface="Times New Roman" panose="02020603050405020304" pitchFamily="18" charset="0"/>
+                <a:ea typeface="Aptos" panose="020B0004020202020204" pitchFamily="34" charset="0"/>
+                <a:cs typeface="Times New Roman" panose="02020603050405020304" pitchFamily="18" charset="0"/>
+              </a:rPr>
+              <a:t>Р</a:t>
+            </a:r>
+            <a:r>
+              <a:rPr lang="ru-RU" sz="2000" kern="100" dirty="0">
+                <a:effectLst/>
+                <a:latin typeface="Times New Roman" panose="02020603050405020304" pitchFamily="18" charset="0"/>
+                <a:ea typeface="Aptos" panose="020B0004020202020204" pitchFamily="34" charset="0"/>
+                <a:cs typeface="Times New Roman" panose="02020603050405020304" pitchFamily="18" charset="0"/>
+              </a:rPr>
+              <a:t>еализовать веб-клиент и десктопное приложение тестирования, а также сервис сессий с механизмом логического вывода.</a:t>
+            </a:r>
+          </a:p>
+          <a:p>
+            <a:pPr marL="342900" lvl="0" indent="-342900">
+              <a:lnSpc>
+                <a:spcPct val="100000"/>
+              </a:lnSpc>
+              <a:spcAft>
+                <a:spcPts val="800"/>
+              </a:spcAft>
+              <a:buFont typeface="+mj-lt"/>
+              <a:buAutoNum type="arabicPeriod"/>
+            </a:pPr>
+            <a:r>
+              <a:rPr lang="ru-RU" sz="2000" kern="100" dirty="0">
+                <a:latin typeface="Times New Roman" panose="02020603050405020304" pitchFamily="18" charset="0"/>
+                <a:ea typeface="Aptos" panose="020B0004020202020204" pitchFamily="34" charset="0"/>
+                <a:cs typeface="Times New Roman" panose="02020603050405020304" pitchFamily="18" charset="0"/>
+              </a:rPr>
+              <a:t>П</a:t>
+            </a:r>
+            <a:r>
+              <a:rPr lang="ru-RU" sz="2000" kern="100" dirty="0">
+                <a:effectLst/>
+                <a:latin typeface="Times New Roman" panose="02020603050405020304" pitchFamily="18" charset="0"/>
+                <a:ea typeface="Aptos" panose="020B0004020202020204" pitchFamily="34" charset="0"/>
+                <a:cs typeface="Times New Roman" panose="02020603050405020304" pitchFamily="18" charset="0"/>
+              </a:rPr>
+              <a:t>ровести тестирование прототипа для проверки корректности экспертной оценки и работоспособности пользовательских интерфейсов.</a:t>
             </a:r>
           </a:p>
         </p:txBody>
@@ -5095,118 +6263,10 @@
           </a:p>
         </p:txBody>
       </p:sp>
-      <p:pic>
-        <p:nvPicPr>
-          <p:cNvPr id="6" name="Рисунок 5" descr="Изображение выглядит как снимок экрана, Графика, Шрифт, круг">
-            <a:extLst>
-              <a:ext uri="{FF2B5EF4-FFF2-40B4-BE49-F238E27FC236}">
-                <a16:creationId xmlns:a16="http://schemas.microsoft.com/office/drawing/2014/main" id="{1959F24F-0306-DDC2-3ED6-DAC4FFB2A610}"/>
-              </a:ext>
-            </a:extLst>
-          </p:cNvPr>
-          <p:cNvPicPr>
-            <a:picLocks noChangeAspect="1"/>
-          </p:cNvPicPr>
-          <p:nvPr/>
-        </p:nvPicPr>
-        <p:blipFill>
-          <a:blip r:embed="rId2">
-            <a:extLst>
-              <a:ext uri="{28A0092B-C50C-407E-A947-70E740481C1C}">
-                <a14:useLocalDpi xmlns:a14="http://schemas.microsoft.com/office/drawing/2010/main" val="0"/>
-              </a:ext>
-            </a:extLst>
-          </a:blip>
-          <a:stretch>
-            <a:fillRect/>
-          </a:stretch>
-        </p:blipFill>
-        <p:spPr>
-          <a:xfrm>
-            <a:off x="633245" y="1979156"/>
-            <a:ext cx="4124272" cy="1218139"/>
-          </a:xfrm>
-          <a:prstGeom prst="rect">
-            <a:avLst/>
-          </a:prstGeom>
-        </p:spPr>
-      </p:pic>
-      <p:pic>
-        <p:nvPicPr>
-          <p:cNvPr id="8" name="Рисунок 7">
-            <a:extLst>
-              <a:ext uri="{FF2B5EF4-FFF2-40B4-BE49-F238E27FC236}">
-                <a16:creationId xmlns:a16="http://schemas.microsoft.com/office/drawing/2014/main" id="{2F6A7F1C-1643-10E1-0592-3DC370EB6F5C}"/>
-              </a:ext>
-            </a:extLst>
-          </p:cNvPr>
-          <p:cNvPicPr>
-            <a:picLocks noChangeAspect="1"/>
-          </p:cNvPicPr>
-          <p:nvPr/>
-        </p:nvPicPr>
-        <p:blipFill>
-          <a:blip r:embed="rId3">
-            <a:extLst>
-              <a:ext uri="{96DAC541-7B7A-43D3-8B79-37D633B846F1}">
-                <asvg:svgBlip xmlns:asvg="http://schemas.microsoft.com/office/drawing/2016/SVG/main" r:embed="rId4"/>
-              </a:ext>
-            </a:extLst>
-          </a:blip>
-          <a:stretch>
-            <a:fillRect/>
-          </a:stretch>
-        </p:blipFill>
-        <p:spPr>
-          <a:xfrm>
-            <a:off x="5644976" y="2047780"/>
-            <a:ext cx="5613938" cy="1030406"/>
-          </a:xfrm>
-          <a:prstGeom prst="rect">
-            <a:avLst/>
-          </a:prstGeom>
-        </p:spPr>
-      </p:pic>
-      <p:pic>
-        <p:nvPicPr>
-          <p:cNvPr id="10" name="Рисунок 9">
-            <a:extLst>
-              <a:ext uri="{FF2B5EF4-FFF2-40B4-BE49-F238E27FC236}">
-                <a16:creationId xmlns:a16="http://schemas.microsoft.com/office/drawing/2014/main" id="{6C3D7EBA-EC9C-452C-9D20-A8CC8E87745F}"/>
-              </a:ext>
-            </a:extLst>
-          </p:cNvPr>
-          <p:cNvPicPr>
-            <a:picLocks noChangeAspect="1"/>
-          </p:cNvPicPr>
-          <p:nvPr/>
-        </p:nvPicPr>
-        <p:blipFill>
-          <a:blip r:embed="rId5">
-            <a:extLst>
-              <a:ext uri="{96DAC541-7B7A-43D3-8B79-37D633B846F1}">
-                <asvg:svgBlip xmlns:asvg="http://schemas.microsoft.com/office/drawing/2016/SVG/main" r:embed="rId6"/>
-              </a:ext>
-            </a:extLst>
-          </a:blip>
-          <a:stretch>
-            <a:fillRect/>
-          </a:stretch>
-        </p:blipFill>
-        <p:spPr>
-          <a:xfrm>
-            <a:off x="2695381" y="3856841"/>
-            <a:ext cx="5756564" cy="1411197"/>
-          </a:xfrm>
-          <a:prstGeom prst="rect">
-            <a:avLst/>
-          </a:prstGeom>
-        </p:spPr>
-      </p:pic>
     </p:spTree>
     <p:extLst>
       <p:ext uri="{BB962C8B-B14F-4D97-AF65-F5344CB8AC3E}">
-        <p14:creationId xmlns:p14="http://schemas.microsoft.com/office/powerpoint/2010/main" val="3990564834"/>
+        <p14:creationId xmlns:p14="http://schemas.microsoft.com/office/powerpoint/2010/main" val="2672466092"/>
       </p:ext>
     </p:extLst>
   </p:cSld>
@@ -5257,17 +6317,17 @@
         </p:spPr>
         <p:txBody>
           <a:bodyPr>
-            <a:noAutofit/>
+            <a:normAutofit fontScale="90000"/>
           </a:bodyPr>
           <a:lstStyle/>
           <a:p>
             <a:pPr algn="ctr"/>
             <a:r>
-              <a:rPr lang="ru-RU" sz="3200" dirty="0">
+              <a:rPr lang="ru-RU" sz="4000" dirty="0">
                 <a:latin typeface="Times New Roman" panose="02020603050405020304" pitchFamily="18" charset="0"/>
                 <a:cs typeface="Times New Roman" panose="02020603050405020304" pitchFamily="18" charset="0"/>
               </a:rPr>
-              <a:t>Общая архитектурная схема взаимодействия компонентов</a:t>
+              <a:t>Анализ аналогов</a:t>
             </a:r>
           </a:p>
         </p:txBody>
@@ -5309,10 +6369,10 @@
       </p:sp>
       <p:pic>
         <p:nvPicPr>
-          <p:cNvPr id="7" name="Рисунок 6" descr="Изображение выглядит как диаграмма, текст, линия, План">
-            <a:extLst>
-              <a:ext uri="{FF2B5EF4-FFF2-40B4-BE49-F238E27FC236}">
-                <a16:creationId xmlns:a16="http://schemas.microsoft.com/office/drawing/2014/main" id="{93E0B18A-5762-73DA-36A3-9ED57B185095}"/>
+          <p:cNvPr id="6" name="Рисунок 5" descr="Изображение выглядит как снимок экрана, Графика, Шрифт, круг">
+            <a:extLst>
+              <a:ext uri="{FF2B5EF4-FFF2-40B4-BE49-F238E27FC236}">
+                <a16:creationId xmlns:a16="http://schemas.microsoft.com/office/drawing/2014/main" id="{1959F24F-0306-DDC2-3ED6-DAC4FFB2A610}"/>
               </a:ext>
             </a:extLst>
           </p:cNvPr>
@@ -5335,8 +6395,152 @@
         </p:blipFill>
         <p:spPr>
           <a:xfrm>
-            <a:off x="416186" y="1842180"/>
-            <a:ext cx="11359627" cy="3173640"/>
+            <a:off x="646892" y="2045117"/>
+            <a:ext cx="4373535" cy="1291761"/>
+          </a:xfrm>
+          <a:prstGeom prst="rect">
+            <a:avLst/>
+          </a:prstGeom>
+        </p:spPr>
+      </p:pic>
+      <p:pic>
+        <p:nvPicPr>
+          <p:cNvPr id="8" name="Рисунок 7">
+            <a:extLst>
+              <a:ext uri="{FF2B5EF4-FFF2-40B4-BE49-F238E27FC236}">
+                <a16:creationId xmlns:a16="http://schemas.microsoft.com/office/drawing/2014/main" id="{2F6A7F1C-1643-10E1-0592-3DC370EB6F5C}"/>
+              </a:ext>
+            </a:extLst>
+          </p:cNvPr>
+          <p:cNvPicPr>
+            <a:picLocks noChangeAspect="1"/>
+          </p:cNvPicPr>
+          <p:nvPr/>
+        </p:nvPicPr>
+        <p:blipFill>
+          <a:blip r:embed="rId3">
+            <a:extLst>
+              <a:ext uri="{96DAC541-7B7A-43D3-8B79-37D633B846F1}">
+                <asvg:svgBlip xmlns:asvg="http://schemas.microsoft.com/office/drawing/2016/SVG/main" r:embed="rId4"/>
+              </a:ext>
+            </a:extLst>
+          </a:blip>
+          <a:stretch>
+            <a:fillRect/>
+          </a:stretch>
+        </p:blipFill>
+        <p:spPr>
+          <a:xfrm>
+            <a:off x="5739862" y="1350185"/>
+            <a:ext cx="5613938" cy="1030406"/>
+          </a:xfrm>
+          <a:prstGeom prst="rect">
+            <a:avLst/>
+          </a:prstGeom>
+        </p:spPr>
+      </p:pic>
+      <p:pic>
+        <p:nvPicPr>
+          <p:cNvPr id="10" name="Рисунок 9">
+            <a:extLst>
+              <a:ext uri="{FF2B5EF4-FFF2-40B4-BE49-F238E27FC236}">
+                <a16:creationId xmlns:a16="http://schemas.microsoft.com/office/drawing/2014/main" id="{6C3D7EBA-EC9C-452C-9D20-A8CC8E87745F}"/>
+              </a:ext>
+            </a:extLst>
+          </p:cNvPr>
+          <p:cNvPicPr>
+            <a:picLocks noChangeAspect="1"/>
+          </p:cNvPicPr>
+          <p:nvPr/>
+        </p:nvPicPr>
+        <p:blipFill>
+          <a:blip r:embed="rId5">
+            <a:extLst>
+              <a:ext uri="{96DAC541-7B7A-43D3-8B79-37D633B846F1}">
+                <asvg:svgBlip xmlns:asvg="http://schemas.microsoft.com/office/drawing/2016/SVG/main" r:embed="rId6"/>
+              </a:ext>
+            </a:extLst>
+          </a:blip>
+          <a:stretch>
+            <a:fillRect/>
+          </a:stretch>
+        </p:blipFill>
+        <p:spPr>
+          <a:xfrm>
+            <a:off x="354356" y="3982850"/>
+            <a:ext cx="5756564" cy="1411197"/>
+          </a:xfrm>
+          <a:prstGeom prst="rect">
+            <a:avLst/>
+          </a:prstGeom>
+        </p:spPr>
+      </p:pic>
+      <p:pic>
+        <p:nvPicPr>
+          <p:cNvPr id="5" name="Рисунок 4">
+            <a:extLst>
+              <a:ext uri="{FF2B5EF4-FFF2-40B4-BE49-F238E27FC236}">
+                <a16:creationId xmlns:a16="http://schemas.microsoft.com/office/drawing/2014/main" id="{365A7D9B-4ADB-41A3-C32C-FE9585E3F1DD}"/>
+              </a:ext>
+            </a:extLst>
+          </p:cNvPr>
+          <p:cNvPicPr>
+            <a:picLocks noChangeAspect="1"/>
+          </p:cNvPicPr>
+          <p:nvPr/>
+        </p:nvPicPr>
+        <p:blipFill>
+          <a:blip r:embed="rId7">
+            <a:extLst>
+              <a:ext uri="{96DAC541-7B7A-43D3-8B79-37D633B846F1}">
+                <asvg:svgBlip xmlns:asvg="http://schemas.microsoft.com/office/drawing/2016/SVG/main" r:embed="rId8"/>
+              </a:ext>
+            </a:extLst>
+          </a:blip>
+          <a:stretch>
+            <a:fillRect/>
+          </a:stretch>
+        </p:blipFill>
+        <p:spPr>
+          <a:xfrm>
+            <a:off x="6239871" y="2843009"/>
+            <a:ext cx="5058807" cy="1492652"/>
+          </a:xfrm>
+          <a:prstGeom prst="rect">
+            <a:avLst/>
+          </a:prstGeom>
+        </p:spPr>
+      </p:pic>
+      <p:pic>
+        <p:nvPicPr>
+          <p:cNvPr id="9" name="Рисунок 8">
+            <a:extLst>
+              <a:ext uri="{FF2B5EF4-FFF2-40B4-BE49-F238E27FC236}">
+                <a16:creationId xmlns:a16="http://schemas.microsoft.com/office/drawing/2014/main" id="{AC9FE595-5664-C370-9165-B9A924A1D3BF}"/>
+              </a:ext>
+            </a:extLst>
+          </p:cNvPr>
+          <p:cNvPicPr>
+            <a:picLocks noChangeAspect="1"/>
+          </p:cNvPicPr>
+          <p:nvPr/>
+        </p:nvPicPr>
+        <p:blipFill>
+          <a:blip r:embed="rId9">
+            <a:extLst>
+              <a:ext uri="{96DAC541-7B7A-43D3-8B79-37D633B846F1}">
+                <asvg:svgBlip xmlns:asvg="http://schemas.microsoft.com/office/drawing/2016/SVG/main" r:embed="rId10"/>
+              </a:ext>
+            </a:extLst>
+          </a:blip>
+          <a:stretch>
+            <a:fillRect/>
+          </a:stretch>
+        </p:blipFill>
+        <p:spPr>
+          <a:xfrm>
+            <a:off x="6858354" y="4762144"/>
+            <a:ext cx="3134571" cy="1492652"/>
           </a:xfrm>
           <a:prstGeom prst="rect">
             <a:avLst/>
@@ -5346,7 +6550,7 @@
     </p:spTree>
     <p:extLst>
       <p:ext uri="{BB962C8B-B14F-4D97-AF65-F5344CB8AC3E}">
-        <p14:creationId xmlns:p14="http://schemas.microsoft.com/office/powerpoint/2010/main" val="676822146"/>
+        <p14:creationId xmlns:p14="http://schemas.microsoft.com/office/powerpoint/2010/main" val="3990564834"/>
       </p:ext>
     </p:extLst>
   </p:cSld>
@@ -5403,25 +6607,11 @@
           <a:p>
             <a:pPr algn="ctr"/>
             <a:r>
-              <a:rPr lang="en-US" sz="3200" dirty="0">
-                <a:latin typeface="Times New Roman" panose="02020603050405020304" pitchFamily="18" charset="0"/>
-                <a:cs typeface="Times New Roman" panose="02020603050405020304" pitchFamily="18" charset="0"/>
-              </a:rPr>
-              <a:t>ER-</a:t>
-            </a:r>
-            <a:r>
-              <a:rPr lang="ru-RU" sz="3600" dirty="0">
-                <a:latin typeface="Times New Roman" panose="02020603050405020304" pitchFamily="18" charset="0"/>
-                <a:cs typeface="Times New Roman" panose="02020603050405020304" pitchFamily="18" charset="0"/>
-              </a:rPr>
-              <a:t>диаграмма</a:t>
-            </a:r>
-            <a:r>
               <a:rPr lang="ru-RU" sz="3200" dirty="0">
                 <a:latin typeface="Times New Roman" panose="02020603050405020304" pitchFamily="18" charset="0"/>
                 <a:cs typeface="Times New Roman" panose="02020603050405020304" pitchFamily="18" charset="0"/>
               </a:rPr>
-              <a:t> связей между документами</a:t>
+              <a:t>Общая архитектурная схема взаимодействия компонентов</a:t>
             </a:r>
           </a:p>
         </p:txBody>
@@ -5463,10 +6653,10 @@
       </p:sp>
       <p:pic>
         <p:nvPicPr>
-          <p:cNvPr id="9" name="Рисунок 8" descr="Изображение выглядит как диаграмма, текст, План, Технический чертеж&#10;&#10;Контент, сгенерированный ИИ, может содержать ошибки.">
-            <a:extLst>
-              <a:ext uri="{FF2B5EF4-FFF2-40B4-BE49-F238E27FC236}">
-                <a16:creationId xmlns:a16="http://schemas.microsoft.com/office/drawing/2014/main" id="{B9DC1207-0E9A-C9C3-AE86-9150A5556E68}"/>
+          <p:cNvPr id="7" name="Рисунок 6" descr="Изображение выглядит как диаграмма, текст, линия, План">
+            <a:extLst>
+              <a:ext uri="{FF2B5EF4-FFF2-40B4-BE49-F238E27FC236}">
+                <a16:creationId xmlns:a16="http://schemas.microsoft.com/office/drawing/2014/main" id="{93E0B18A-5762-73DA-36A3-9ED57B185095}"/>
               </a:ext>
             </a:extLst>
           </p:cNvPr>
@@ -5489,8 +6679,8 @@
         </p:blipFill>
         <p:spPr>
           <a:xfrm>
-            <a:off x="1132270" y="878163"/>
-            <a:ext cx="9927460" cy="5614711"/>
+            <a:off x="416186" y="1842180"/>
+            <a:ext cx="11359627" cy="3173640"/>
           </a:xfrm>
           <a:prstGeom prst="rect">
             <a:avLst/>
@@ -5500,7 +6690,7 @@
     </p:spTree>
     <p:extLst>
       <p:ext uri="{BB962C8B-B14F-4D97-AF65-F5344CB8AC3E}">
-        <p14:creationId xmlns:p14="http://schemas.microsoft.com/office/powerpoint/2010/main" val="921836473"/>
+        <p14:creationId xmlns:p14="http://schemas.microsoft.com/office/powerpoint/2010/main" val="676822146"/>
       </p:ext>
     </p:extLst>
   </p:cSld>
@@ -5527,86 +6717,12 @@
           <a:chExt cx="0" cy="0"/>
         </a:xfrm>
       </p:grpSpPr>
-      <p:sp>
-        <p:nvSpPr>
-          <p:cNvPr id="2" name="Заголовок 1">
-            <a:extLst>
-              <a:ext uri="{FF2B5EF4-FFF2-40B4-BE49-F238E27FC236}">
-                <a16:creationId xmlns:a16="http://schemas.microsoft.com/office/drawing/2014/main" id="{620C646A-788F-4874-840A-A52EEC59321A}"/>
-              </a:ext>
-            </a:extLst>
-          </p:cNvPr>
-          <p:cNvSpPr>
-            <a:spLocks noGrp="1"/>
-          </p:cNvSpPr>
-          <p:nvPr>
-            <p:ph type="title"/>
-          </p:nvPr>
-        </p:nvSpPr>
-        <p:spPr>
-          <a:xfrm>
-            <a:off x="838200" y="365126"/>
-            <a:ext cx="10515600" cy="522642"/>
-          </a:xfrm>
-        </p:spPr>
-        <p:txBody>
-          <a:bodyPr>
-            <a:noAutofit/>
-          </a:bodyPr>
-          <a:lstStyle/>
-          <a:p>
-            <a:pPr algn="ctr"/>
-            <a:r>
-              <a:rPr lang="ru-RU" sz="3200" dirty="0">
-                <a:latin typeface="Times New Roman" panose="02020603050405020304" pitchFamily="18" charset="0"/>
-                <a:cs typeface="Times New Roman" panose="02020603050405020304" pitchFamily="18" charset="0"/>
-              </a:rPr>
-              <a:t>Экспертная подсистема</a:t>
-            </a:r>
-          </a:p>
-        </p:txBody>
-      </p:sp>
-      <p:sp>
-        <p:nvSpPr>
-          <p:cNvPr id="4" name="Номер слайда 3">
-            <a:extLst>
-              <a:ext uri="{FF2B5EF4-FFF2-40B4-BE49-F238E27FC236}">
-                <a16:creationId xmlns:a16="http://schemas.microsoft.com/office/drawing/2014/main" id="{36742D18-EF0F-2CCA-3B72-38030B27FBCC}"/>
-              </a:ext>
-            </a:extLst>
-          </p:cNvPr>
-          <p:cNvSpPr>
-            <a:spLocks noGrp="1"/>
-          </p:cNvSpPr>
-          <p:nvPr>
-            <p:ph type="sldNum" sz="quarter" idx="12"/>
-          </p:nvPr>
-        </p:nvSpPr>
-        <p:spPr>
-          <a:xfrm>
-            <a:off x="8610600" y="6176963"/>
-            <a:ext cx="2743200" cy="365125"/>
-          </a:xfrm>
-        </p:spPr>
-        <p:txBody>
-          <a:bodyPr/>
-          <a:lstStyle/>
-          <a:p>
-            <a:fld id="{40CEF85B-4928-4330-BA98-C984623441A6}" type="slidenum">
-              <a:rPr lang="ru-RU" sz="4400" smtClean="0"/>
-              <a:pPr/>
-              <a:t>6</a:t>
-            </a:fld>
-            <a:endParaRPr lang="ru-RU" sz="4400" dirty="0"/>
-          </a:p>
-        </p:txBody>
-      </p:sp>
       <p:pic>
         <p:nvPicPr>
-          <p:cNvPr id="5" name="Рисунок 4" descr="Изображение выглядит как текст, снимок экрана, диаграмма, Параллельный&#10;&#10;Контент, сгенерированный ИИ, может содержать ошибки.">
-            <a:extLst>
-              <a:ext uri="{FF2B5EF4-FFF2-40B4-BE49-F238E27FC236}">
-                <a16:creationId xmlns:a16="http://schemas.microsoft.com/office/drawing/2014/main" id="{92AF96AE-783D-66F5-0115-A20EA27F509B}"/>
+          <p:cNvPr id="9" name="Рисунок 8" descr="Изображение выглядит как диаграмма, текст, План, Технический чертеж&#10;&#10;Контент, сгенерированный ИИ, может содержать ошибки.">
+            <a:extLst>
+              <a:ext uri="{FF2B5EF4-FFF2-40B4-BE49-F238E27FC236}">
+                <a16:creationId xmlns:a16="http://schemas.microsoft.com/office/drawing/2014/main" id="{B9DC1207-0E9A-C9C3-AE86-9150A5556E68}"/>
               </a:ext>
             </a:extLst>
           </p:cNvPr>
@@ -5629,18 +6745,106 @@
         </p:blipFill>
         <p:spPr>
           <a:xfrm>
-            <a:off x="3598736" y="1008109"/>
-            <a:ext cx="4994528" cy="5484765"/>
+            <a:off x="526624" y="721885"/>
+            <a:ext cx="10710527" cy="6057593"/>
           </a:xfrm>
           <a:prstGeom prst="rect">
             <a:avLst/>
           </a:prstGeom>
         </p:spPr>
       </p:pic>
+      <p:sp>
+        <p:nvSpPr>
+          <p:cNvPr id="2" name="Заголовок 1">
+            <a:extLst>
+              <a:ext uri="{FF2B5EF4-FFF2-40B4-BE49-F238E27FC236}">
+                <a16:creationId xmlns:a16="http://schemas.microsoft.com/office/drawing/2014/main" id="{620C646A-788F-4874-840A-A52EEC59321A}"/>
+              </a:ext>
+            </a:extLst>
+          </p:cNvPr>
+          <p:cNvSpPr>
+            <a:spLocks noGrp="1"/>
+          </p:cNvSpPr>
+          <p:nvPr>
+            <p:ph type="title"/>
+          </p:nvPr>
+        </p:nvSpPr>
+        <p:spPr>
+          <a:xfrm>
+            <a:off x="838200" y="199243"/>
+            <a:ext cx="10515600" cy="522642"/>
+          </a:xfrm>
+        </p:spPr>
+        <p:txBody>
+          <a:bodyPr>
+            <a:noAutofit/>
+          </a:bodyPr>
+          <a:lstStyle/>
+          <a:p>
+            <a:pPr algn="ctr"/>
+            <a:r>
+              <a:rPr lang="en-US" sz="3200" dirty="0">
+                <a:latin typeface="Times New Roman" panose="02020603050405020304" pitchFamily="18" charset="0"/>
+                <a:cs typeface="Times New Roman" panose="02020603050405020304" pitchFamily="18" charset="0"/>
+              </a:rPr>
+              <a:t>ER-</a:t>
+            </a:r>
+            <a:r>
+              <a:rPr lang="ru-RU" sz="3600" dirty="0">
+                <a:latin typeface="Times New Roman" panose="02020603050405020304" pitchFamily="18" charset="0"/>
+                <a:cs typeface="Times New Roman" panose="02020603050405020304" pitchFamily="18" charset="0"/>
+              </a:rPr>
+              <a:t>диаграмма</a:t>
+            </a:r>
+            <a:r>
+              <a:rPr lang="ru-RU" sz="3200" dirty="0">
+                <a:latin typeface="Times New Roman" panose="02020603050405020304" pitchFamily="18" charset="0"/>
+                <a:cs typeface="Times New Roman" panose="02020603050405020304" pitchFamily="18" charset="0"/>
+              </a:rPr>
+              <a:t> связей между документами</a:t>
+            </a:r>
+          </a:p>
+        </p:txBody>
+      </p:sp>
+      <p:sp>
+        <p:nvSpPr>
+          <p:cNvPr id="4" name="Номер слайда 3">
+            <a:extLst>
+              <a:ext uri="{FF2B5EF4-FFF2-40B4-BE49-F238E27FC236}">
+                <a16:creationId xmlns:a16="http://schemas.microsoft.com/office/drawing/2014/main" id="{36742D18-EF0F-2CCA-3B72-38030B27FBCC}"/>
+              </a:ext>
+            </a:extLst>
+          </p:cNvPr>
+          <p:cNvSpPr>
+            <a:spLocks noGrp="1"/>
+          </p:cNvSpPr>
+          <p:nvPr>
+            <p:ph type="sldNum" sz="quarter" idx="12"/>
+          </p:nvPr>
+        </p:nvSpPr>
+        <p:spPr>
+          <a:xfrm>
+            <a:off x="8610600" y="6176963"/>
+            <a:ext cx="2743200" cy="365125"/>
+          </a:xfrm>
+        </p:spPr>
+        <p:txBody>
+          <a:bodyPr/>
+          <a:lstStyle/>
+          <a:p>
+            <a:fld id="{40CEF85B-4928-4330-BA98-C984623441A6}" type="slidenum">
+              <a:rPr lang="ru-RU" sz="4400" smtClean="0"/>
+              <a:pPr/>
+              <a:t>6</a:t>
+            </a:fld>
+            <a:endParaRPr lang="ru-RU" sz="4400" dirty="0"/>
+          </a:p>
+        </p:txBody>
+      </p:sp>
     </p:spTree>
     <p:extLst>
       <p:ext uri="{BB962C8B-B14F-4D97-AF65-F5344CB8AC3E}">
-        <p14:creationId xmlns:p14="http://schemas.microsoft.com/office/powerpoint/2010/main" val="4096380397"/>
+        <p14:creationId xmlns:p14="http://schemas.microsoft.com/office/powerpoint/2010/main" val="921836473"/>
       </p:ext>
     </p:extLst>
   </p:cSld>
@@ -5685,7 +6889,7 @@
         </p:nvSpPr>
         <p:spPr>
           <a:xfrm>
-            <a:off x="838200" y="365126"/>
+            <a:off x="838200" y="217797"/>
             <a:ext cx="10515600" cy="522642"/>
           </a:xfrm>
         </p:spPr>
@@ -5701,7 +6905,7 @@
                 <a:latin typeface="Times New Roman" panose="02020603050405020304" pitchFamily="18" charset="0"/>
                 <a:cs typeface="Times New Roman" panose="02020603050405020304" pitchFamily="18" charset="0"/>
               </a:rPr>
-              <a:t>Авторизация и регистрация</a:t>
+              <a:t>Экспертная подсистема</a:t>
             </a:r>
           </a:p>
         </p:txBody>
@@ -5743,10 +6947,10 @@
       </p:sp>
       <p:pic>
         <p:nvPicPr>
-          <p:cNvPr id="3" name="Рисунок 2">
-            <a:extLst>
-              <a:ext uri="{FF2B5EF4-FFF2-40B4-BE49-F238E27FC236}">
-                <a16:creationId xmlns:a16="http://schemas.microsoft.com/office/drawing/2014/main" id="{CDB71ED8-BAF2-85C6-C3AB-B0EBBD835299}"/>
+          <p:cNvPr id="5" name="Рисунок 4" descr="Изображение выглядит как текст, снимок экрана, диаграмма, Параллельный&#10;&#10;Контент, сгенерированный ИИ, может содержать ошибки.">
+            <a:extLst>
+              <a:ext uri="{FF2B5EF4-FFF2-40B4-BE49-F238E27FC236}">
+                <a16:creationId xmlns:a16="http://schemas.microsoft.com/office/drawing/2014/main" id="{92AF96AE-783D-66F5-0115-A20EA27F509B}"/>
               </a:ext>
             </a:extLst>
           </p:cNvPr>
@@ -5756,45 +6960,21 @@
           <p:nvPr/>
         </p:nvPicPr>
         <p:blipFill>
-          <a:blip r:embed="rId2"/>
+          <a:blip r:embed="rId2">
+            <a:extLst>
+              <a:ext uri="{28A0092B-C50C-407E-A947-70E740481C1C}">
+                <a14:useLocalDpi xmlns:a14="http://schemas.microsoft.com/office/drawing/2010/main" val="0"/>
+              </a:ext>
+            </a:extLst>
+          </a:blip>
           <a:stretch>
             <a:fillRect/>
           </a:stretch>
         </p:blipFill>
         <p:spPr>
           <a:xfrm>
-            <a:off x="1439565" y="1515833"/>
-            <a:ext cx="3828548" cy="4436571"/>
-          </a:xfrm>
-          <a:prstGeom prst="rect">
-            <a:avLst/>
-          </a:prstGeom>
-        </p:spPr>
-      </p:pic>
-      <p:pic>
-        <p:nvPicPr>
-          <p:cNvPr id="6" name="Рисунок 5">
-            <a:extLst>
-              <a:ext uri="{FF2B5EF4-FFF2-40B4-BE49-F238E27FC236}">
-                <a16:creationId xmlns:a16="http://schemas.microsoft.com/office/drawing/2014/main" id="{0900AF99-4102-7261-B3D8-463B64FD4EE1}"/>
-              </a:ext>
-            </a:extLst>
-          </p:cNvPr>
-          <p:cNvPicPr>
-            <a:picLocks noChangeAspect="1"/>
-          </p:cNvPicPr>
-          <p:nvPr/>
-        </p:nvPicPr>
-        <p:blipFill>
-          <a:blip r:embed="rId3"/>
-          <a:stretch>
-            <a:fillRect/>
-          </a:stretch>
-        </p:blipFill>
-        <p:spPr>
-          <a:xfrm>
-            <a:off x="6714698" y="1238100"/>
-            <a:ext cx="3009331" cy="4992039"/>
+            <a:off x="3370997" y="733751"/>
+            <a:ext cx="5576854" cy="6124249"/>
           </a:xfrm>
           <a:prstGeom prst="rect">
             <a:avLst/>
@@ -5804,7 +6984,7 @@
     </p:spTree>
     <p:extLst>
       <p:ext uri="{BB962C8B-B14F-4D97-AF65-F5344CB8AC3E}">
-        <p14:creationId xmlns:p14="http://schemas.microsoft.com/office/powerpoint/2010/main" val="2348092726"/>
+        <p14:creationId xmlns:p14="http://schemas.microsoft.com/office/powerpoint/2010/main" val="4096380397"/>
       </p:ext>
     </p:extLst>
   </p:cSld>
@@ -5865,7 +7045,7 @@
                 <a:latin typeface="Times New Roman" panose="02020603050405020304" pitchFamily="18" charset="0"/>
                 <a:cs typeface="Times New Roman" panose="02020603050405020304" pitchFamily="18" charset="0"/>
               </a:rPr>
-              <a:t>Управление пользователями и ролями</a:t>
+              <a:t>Авторизация и регистрация</a:t>
             </a:r>
           </a:p>
         </p:txBody>
@@ -5907,10 +7087,10 @@
       </p:sp>
       <p:pic>
         <p:nvPicPr>
-          <p:cNvPr id="6" name="Рисунок 5">
-            <a:extLst>
-              <a:ext uri="{FF2B5EF4-FFF2-40B4-BE49-F238E27FC236}">
-                <a16:creationId xmlns:a16="http://schemas.microsoft.com/office/drawing/2014/main" id="{CD958FB3-B90B-7D9D-BAA0-2B9DECEC8373}"/>
+          <p:cNvPr id="3" name="Рисунок 2">
+            <a:extLst>
+              <a:ext uri="{FF2B5EF4-FFF2-40B4-BE49-F238E27FC236}">
+                <a16:creationId xmlns:a16="http://schemas.microsoft.com/office/drawing/2014/main" id="{CDB71ED8-BAF2-85C6-C3AB-B0EBBD835299}"/>
               </a:ext>
             </a:extLst>
           </p:cNvPr>
@@ -5927,20 +7107,25 @@
         </p:blipFill>
         <p:spPr>
           <a:xfrm>
-            <a:off x="838200" y="1248770"/>
-            <a:ext cx="10064574" cy="1890268"/>
+            <a:off x="838200" y="1416104"/>
+            <a:ext cx="4381009" cy="5076770"/>
           </a:xfrm>
           <a:prstGeom prst="rect">
             <a:avLst/>
           </a:prstGeom>
+          <a:ln w="12700">
+            <a:solidFill>
+              <a:schemeClr val="tx1"/>
+            </a:solidFill>
+          </a:ln>
         </p:spPr>
       </p:pic>
       <p:pic>
         <p:nvPicPr>
-          <p:cNvPr id="8" name="Рисунок 7">
-            <a:extLst>
-              <a:ext uri="{FF2B5EF4-FFF2-40B4-BE49-F238E27FC236}">
-                <a16:creationId xmlns:a16="http://schemas.microsoft.com/office/drawing/2014/main" id="{578DBC48-C0E0-2486-B627-7A190C4816F3}"/>
+          <p:cNvPr id="6" name="Рисунок 5">
+            <a:extLst>
+              <a:ext uri="{FF2B5EF4-FFF2-40B4-BE49-F238E27FC236}">
+                <a16:creationId xmlns:a16="http://schemas.microsoft.com/office/drawing/2014/main" id="{0900AF99-4102-7261-B3D8-463B64FD4EE1}"/>
               </a:ext>
             </a:extLst>
           </p:cNvPr>
@@ -5957,18 +7142,23 @@
         </p:blipFill>
         <p:spPr>
           <a:xfrm>
-            <a:off x="838200" y="3429000"/>
-            <a:ext cx="9868861" cy="2747963"/>
+            <a:off x="6516804" y="1016779"/>
+            <a:ext cx="3384645" cy="5614630"/>
           </a:xfrm>
           <a:prstGeom prst="rect">
             <a:avLst/>
           </a:prstGeom>
+          <a:ln w="12700">
+            <a:solidFill>
+              <a:schemeClr val="tx1"/>
+            </a:solidFill>
+          </a:ln>
         </p:spPr>
       </p:pic>
     </p:spTree>
     <p:extLst>
       <p:ext uri="{BB962C8B-B14F-4D97-AF65-F5344CB8AC3E}">
-        <p14:creationId xmlns:p14="http://schemas.microsoft.com/office/powerpoint/2010/main" val="1355270388"/>
+        <p14:creationId xmlns:p14="http://schemas.microsoft.com/office/powerpoint/2010/main" val="2348092726"/>
       </p:ext>
     </p:extLst>
   </p:cSld>
@@ -6029,7 +7219,7 @@
                 <a:latin typeface="Times New Roman" panose="02020603050405020304" pitchFamily="18" charset="0"/>
                 <a:cs typeface="Times New Roman" panose="02020603050405020304" pitchFamily="18" charset="0"/>
               </a:rPr>
-              <a:t>Банк вопросов</a:t>
+              <a:t>Управление пользователями и ролями</a:t>
             </a:r>
           </a:p>
         </p:txBody>
@@ -6071,10 +7261,10 @@
       </p:sp>
       <p:pic>
         <p:nvPicPr>
-          <p:cNvPr id="6" name="Рисунок 5">
-            <a:extLst>
-              <a:ext uri="{FF2B5EF4-FFF2-40B4-BE49-F238E27FC236}">
-                <a16:creationId xmlns:a16="http://schemas.microsoft.com/office/drawing/2014/main" id="{66986AC6-08F4-90A8-A7FE-E09E8A9403CF}"/>
+          <p:cNvPr id="8" name="Рисунок 7">
+            <a:extLst>
+              <a:ext uri="{FF2B5EF4-FFF2-40B4-BE49-F238E27FC236}">
+                <a16:creationId xmlns:a16="http://schemas.microsoft.com/office/drawing/2014/main" id="{578DBC48-C0E0-2486-B627-7A190C4816F3}"/>
               </a:ext>
             </a:extLst>
           </p:cNvPr>
@@ -6091,20 +7281,25 @@
         </p:blipFill>
         <p:spPr>
           <a:xfrm>
-            <a:off x="559558" y="887768"/>
-            <a:ext cx="4212107" cy="5543676"/>
+            <a:off x="838200" y="3429000"/>
+            <a:ext cx="10084571" cy="2808027"/>
           </a:xfrm>
           <a:prstGeom prst="rect">
             <a:avLst/>
           </a:prstGeom>
+          <a:ln w="12700">
+            <a:solidFill>
+              <a:schemeClr val="tx1"/>
+            </a:solidFill>
+          </a:ln>
         </p:spPr>
       </p:pic>
       <p:pic>
         <p:nvPicPr>
-          <p:cNvPr id="8" name="Рисунок 7">
-            <a:extLst>
-              <a:ext uri="{FF2B5EF4-FFF2-40B4-BE49-F238E27FC236}">
-                <a16:creationId xmlns:a16="http://schemas.microsoft.com/office/drawing/2014/main" id="{72E866CF-57AE-5284-364F-C22E2B15848C}"/>
+          <p:cNvPr id="5" name="Рисунок 4">
+            <a:extLst>
+              <a:ext uri="{FF2B5EF4-FFF2-40B4-BE49-F238E27FC236}">
+                <a16:creationId xmlns:a16="http://schemas.microsoft.com/office/drawing/2014/main" id="{B8547133-43ED-FF95-C85A-780AC6A225E0}"/>
               </a:ext>
             </a:extLst>
           </p:cNvPr>
@@ -6121,18 +7316,23 @@
         </p:blipFill>
         <p:spPr>
           <a:xfrm>
-            <a:off x="4970984" y="1878438"/>
-            <a:ext cx="6821677" cy="3101123"/>
+            <a:off x="838200" y="1266395"/>
+            <a:ext cx="10084571" cy="1741106"/>
           </a:xfrm>
           <a:prstGeom prst="rect">
             <a:avLst/>
           </a:prstGeom>
+          <a:ln w="12700">
+            <a:solidFill>
+              <a:schemeClr val="tx1"/>
+            </a:solidFill>
+          </a:ln>
         </p:spPr>
       </p:pic>
     </p:spTree>
     <p:extLst>
       <p:ext uri="{BB962C8B-B14F-4D97-AF65-F5344CB8AC3E}">
-        <p14:creationId xmlns:p14="http://schemas.microsoft.com/office/powerpoint/2010/main" val="816686127"/>
+        <p14:creationId xmlns:p14="http://schemas.microsoft.com/office/powerpoint/2010/main" val="1355270388"/>
       </p:ext>
     </p:extLst>
   </p:cSld>
